--- a/examples/pptx/github-intro.pptx
+++ b/examples/pptx/github-intro.pptx
@@ -23,7 +23,6 @@
     <p:sldId id="271" r:id="rId23"/>
     <p:sldId id="272" r:id="rId24"/>
     <p:sldId id="273" r:id="rId25"/>
-    <p:sldId id="274" r:id="rId26"/>
   </p:sldIdLst>
   <p:sldSz cx="12192000" cy="6858000" type="screen16x9"/>
   <p:notesSz cx="6858000" cy="9144000"/>
@@ -1080,7 +1079,7 @@
           <a:lstStyle/>
           <a:p>
             <a:r>
-              <a:t>To try it: make a free account, create a repository with a README, then edit that README on the website, commit it, and look at the history you just made.</a:t>
+              <a:t>Every screenshot in this deck was captured on the twenty-first of October 2026 from the pages listed here, and each slide's Source link opens the exact page.</a:t>
             </a:r>
           </a:p>
         </p:txBody>
@@ -1150,77 +1149,7 @@
           <a:lstStyle/>
           <a:p>
             <a:r>
-              <a:t>Every screenshot in this deck was captured on the twenty-first of October 2026 from the pages listed here, and each slide's Source link opens the exact page.</a:t>
-            </a:r>
-          </a:p>
-        </p:txBody>
-      </p:sp>
-      <p:sp>
-        <p:nvSpPr>
-          <p:cNvPr id="4" name="Slide Number Placeholder 3"/>
-          <p:cNvSpPr>
-            <a:spLocks noGrp="1"/>
-          </p:cNvSpPr>
-          <p:nvPr>
-            <p:ph type="sldNum" idx="5" sz="quarter"/>
-          </p:nvPr>
-        </p:nvSpPr>
-        <p:spPr/>
-      </p:sp>
-    </p:spTree>
-  </p:cSld>
-  <p:clrMapOvr>
-    <a:masterClrMapping/>
-  </p:clrMapOvr>
-</p:notes>
-</file>
-
-<file path=ppt/notesSlides/notesSlide19.xml><?xml version="1.0" encoding="utf-8"?>
-<p:notes xmlns:a="http://schemas.openxmlformats.org/drawingml/2006/main" xmlns:p="http://schemas.openxmlformats.org/presentationml/2006/main" xmlns:r="http://schemas.openxmlformats.org/officeDocument/2006/relationships">
-  <p:cSld>
-    <p:spTree>
-      <p:nvGrpSpPr>
-        <p:cNvPr id="1" name=""/>
-        <p:cNvGrpSpPr/>
-        <p:nvPr/>
-      </p:nvGrpSpPr>
-      <p:grpSpPr>
-        <a:xfrm>
-          <a:off x="0" y="0"/>
-          <a:ext cx="0" cy="0"/>
-          <a:chOff x="0" y="0"/>
-          <a:chExt cx="0" cy="0"/>
-        </a:xfrm>
-      </p:grpSpPr>
-      <p:sp>
-        <p:nvSpPr>
-          <p:cNvPr id="2" name="Slide Image Placeholder 1"/>
-          <p:cNvSpPr>
-            <a:spLocks noGrp="1"/>
-          </p:cNvSpPr>
-          <p:nvPr>
-            <p:ph type="sldImg" idx="2"/>
-          </p:nvPr>
-        </p:nvSpPr>
-        <p:spPr/>
-      </p:sp>
-      <p:sp>
-        <p:nvSpPr>
-          <p:cNvPr id="3" name="Notes Placeholder 2"/>
-          <p:cNvSpPr>
-            <a:spLocks noGrp="1"/>
-          </p:cNvSpPr>
-          <p:nvPr>
-            <p:ph type="body" idx="3" sz="quarter"/>
-          </p:nvPr>
-        </p:nvSpPr>
-        <p:spPr/>
-        <p:txBody>
-          <a:bodyPr/>
-          <a:lstStyle/>
-          <a:p>
-            <a:r>
-              <a:t>So the last question is yours: what will you put in your first repository?</a:t>
+              <a:t>To try it: make a free account, create a repository with a README, then edit that README on the website, commit it, and look at the history you just made.</a:t>
             </a:r>
           </a:p>
         </p:txBody>
@@ -4197,6 +4126,43 @@
         <p:spPr>
           <a:xfrm>
             <a:off x="6233160" y="1499616"/>
+            <a:ext cx="5958840" cy="609600"/>
+          </a:xfrm>
+          <a:prstGeom prst="rect">
+            <a:avLst/>
+          </a:prstGeom>
+          <a:noFill/>
+        </p:spPr>
+        <p:txBody>
+          <a:bodyPr wrap="none" lIns="0" rIns="0">
+            <a:noAutofit/>
+          </a:bodyPr>
+          <a:lstStyle/>
+          <a:p>
+            <a:pPr algn="l"/>
+            <a:r>
+              <a:rPr sz="3400" b="0" i="0">
+                <a:solidFill>
+                  <a:srgbClr val="0A2240"/>
+                </a:solidFill>
+                <a:latin typeface="Arial"/>
+              </a:rPr>
+              <a:t>Built with customers.</a:t>
+            </a:r>
+          </a:p>
+        </p:txBody>
+      </p:sp>
+      <p:sp>
+        <p:nvSpPr>
+          <p:cNvPr id="7" name="TextBox 6"/>
+          <p:cNvSpPr/>
+          <p:nvPr>
+            <p:ph type="body" idx="2"/>
+          </p:nvPr>
+        </p:nvSpPr>
+        <p:spPr>
+          <a:xfrm>
+            <a:off x="6233160" y="2383536"/>
             <a:ext cx="5501640" cy="1127760"/>
           </a:xfrm>
           <a:prstGeom prst="rect">
@@ -4218,44 +4184,7 @@
                 </a:solidFill>
                 <a:latin typeface="Arial"/>
               </a:rPr>
-              <a:t>Built with customers, not just for them.</a:t>
-            </a:r>
-          </a:p>
-        </p:txBody>
-      </p:sp>
-      <p:sp>
-        <p:nvSpPr>
-          <p:cNvPr id="7" name="TextBox 6"/>
-          <p:cNvSpPr/>
-          <p:nvPr>
-            <p:ph type="body" idx="2"/>
-          </p:nvPr>
-        </p:nvSpPr>
-        <p:spPr>
-          <a:xfrm>
-            <a:off x="6233160" y="2901696"/>
-            <a:ext cx="5501640" cy="1127760"/>
-          </a:xfrm>
-          <a:prstGeom prst="rect">
-            <a:avLst/>
-          </a:prstGeom>
-          <a:noFill/>
-        </p:spPr>
-        <p:txBody>
-          <a:bodyPr wrap="square" lIns="0" rIns="0">
-            <a:noAutofit/>
-          </a:bodyPr>
-          <a:lstStyle/>
-          <a:p>
-            <a:pPr algn="l"/>
-            <a:r>
-              <a:rPr sz="3400" b="0" i="0">
-                <a:solidFill>
-                  <a:srgbClr val="0A2240"/>
-                </a:solidFill>
-                <a:latin typeface="Arial"/>
-              </a:rPr>
-              <a:t>60% faster rollout; 50% fewer tickets.</a:t>
+              <a:t>60% faster; 50% fewer tickets</a:t>
             </a:r>
           </a:p>
         </p:txBody>
@@ -4274,405 +4203,6 @@
 </file>
 
 <file path=ppt/slideLayouts/slideLayout18.xml><?xml version="1.0" encoding="utf-8"?>
-<p:sldLayout xmlns:a="http://schemas.openxmlformats.org/drawingml/2006/main" xmlns:r="http://schemas.openxmlformats.org/officeDocument/2006/relationships" xmlns:p="http://schemas.openxmlformats.org/presentationml/2006/main" type="blank" preserve="1">
-  <p:cSld name="slidekit · Card Grid">
-    <p:bg>
-      <p:bgPr>
-        <a:solidFill>
-          <a:srgbClr val="FFFFFF"/>
-        </a:solidFill>
-        <a:effectLst/>
-      </p:bgPr>
-    </p:bg>
-    <p:spTree>
-      <p:nvGrpSpPr>
-        <p:cNvPr id="1" name=""/>
-        <p:cNvGrpSpPr/>
-        <p:nvPr/>
-      </p:nvGrpSpPr>
-      <p:grpSpPr>
-        <a:xfrm>
-          <a:off x="0" y="0"/>
-          <a:ext cx="0" cy="0"/>
-          <a:chOff x="0" y="0"/>
-          <a:chExt cx="0" cy="0"/>
-        </a:xfrm>
-      </p:grpSpPr>
-      <p:sp>
-        <p:nvSpPr>
-          <p:cNvPr id="4" name="Slide Number Placeholder 3"/>
-          <p:cNvSpPr>
-            <a:spLocks noGrp="1"/>
-          </p:cNvSpPr>
-          <p:nvPr>
-            <p:ph type="sldNum" sz="quarter" idx="12"/>
-          </p:nvPr>
-        </p:nvSpPr>
-        <p:spPr>
-          <a:xfrm>
-            <a:off x="11186160" y="6035040"/>
-            <a:ext cx="548640" cy="365760"/>
-          </a:xfrm>
-        </p:spPr>
-        <p:txBody>
-          <a:bodyPr/>
-          <a:lstStyle/>
-          <a:p>
-            <a:fld id="{C1FF6DA9-008F-8B48-92A6-B652298478BF}" type="slidenum">
-              <a:rPr lang="en-US" smtClean="0"/>
-              <a:t>‹#›</a:t>
-            </a:fld>
-            <a:endParaRPr lang="en-US"/>
-          </a:p>
-        </p:txBody>
-      </p:sp>
-      <p:sp>
-        <p:nvSpPr>
-          <p:cNvPr id="5" name="TextBox 4"/>
-          <p:cNvSpPr/>
-          <p:nvPr>
-            <p:ph type="title"/>
-          </p:nvPr>
-        </p:nvSpPr>
-        <p:spPr>
-          <a:xfrm>
-            <a:off x="457200" y="457200"/>
-            <a:ext cx="11277600" cy="768096"/>
-          </a:xfrm>
-          <a:prstGeom prst="rect">
-            <a:avLst/>
-          </a:prstGeom>
-          <a:noFill/>
-        </p:spPr>
-        <p:txBody>
-          <a:bodyPr wrap="none" lIns="0" rIns="0">
-            <a:noAutofit/>
-          </a:bodyPr>
-          <a:lstStyle/>
-          <a:p>
-            <a:pPr algn="l"/>
-            <a:r>
-              <a:rPr sz="4200" b="1" i="0">
-                <a:solidFill>
-                  <a:srgbClr val="0072CE"/>
-                </a:solidFill>
-                <a:latin typeface="Arial"/>
-              </a:rPr>
-              <a:t>What We Offer</a:t>
-            </a:r>
-          </a:p>
-        </p:txBody>
-      </p:sp>
-      <p:sp>
-        <p:nvSpPr>
-          <p:cNvPr id="6" name="TextBox 5"/>
-          <p:cNvSpPr/>
-          <p:nvPr>
-            <p:ph type="body" idx="1"/>
-          </p:nvPr>
-        </p:nvSpPr>
-        <p:spPr>
-          <a:xfrm>
-            <a:off x="457200" y="1499616"/>
-            <a:ext cx="2831366" cy="518159"/>
-          </a:xfrm>
-          <a:prstGeom prst="rect">
-            <a:avLst/>
-          </a:prstGeom>
-          <a:noFill/>
-        </p:spPr>
-        <p:txBody>
-          <a:bodyPr wrap="none" lIns="0" rIns="0">
-            <a:noAutofit/>
-          </a:bodyPr>
-          <a:lstStyle/>
-          <a:p>
-            <a:pPr algn="l"/>
-            <a:r>
-              <a:rPr sz="3400" b="1" i="0">
-                <a:solidFill>
-                  <a:srgbClr val="0A2240"/>
-                </a:solidFill>
-                <a:latin typeface="Arial"/>
-              </a:rPr>
-              <a:t>Insights</a:t>
-            </a:r>
-          </a:p>
-        </p:txBody>
-      </p:sp>
-      <p:sp>
-        <p:nvSpPr>
-          <p:cNvPr id="7" name="TextBox 6"/>
-          <p:cNvSpPr/>
-          <p:nvPr>
-            <p:ph type="body" idx="2"/>
-          </p:nvPr>
-        </p:nvSpPr>
-        <p:spPr>
-          <a:xfrm>
-            <a:off x="457200" y="2154935"/>
-            <a:ext cx="2613660" cy="3605785"/>
-          </a:xfrm>
-          <a:prstGeom prst="rect">
-            <a:avLst/>
-          </a:prstGeom>
-          <a:noFill/>
-        </p:spPr>
-        <p:txBody>
-          <a:bodyPr wrap="square" lIns="0" rIns="0">
-            <a:noAutofit/>
-          </a:bodyPr>
-          <a:lstStyle/>
-          <a:p>
-            <a:pPr algn="l"/>
-            <a:r>
-              <a:rPr sz="3400" b="0" i="0">
-                <a:solidFill>
-                  <a:srgbClr val="0A2240"/>
-                </a:solidFill>
-                <a:latin typeface="Arial"/>
-              </a:rPr>
-              <a:t>Live data and AI analytics.</a:t>
-            </a:r>
-          </a:p>
-        </p:txBody>
-      </p:sp>
-      <p:sp>
-        <p:nvSpPr>
-          <p:cNvPr id="8" name="TextBox 7"/>
-          <p:cNvSpPr/>
-          <p:nvPr>
-            <p:ph type="body" idx="3"/>
-          </p:nvPr>
-        </p:nvSpPr>
-        <p:spPr>
-          <a:xfrm>
-            <a:off x="3345180" y="1499616"/>
-            <a:ext cx="2909292" cy="518159"/>
-          </a:xfrm>
-          <a:prstGeom prst="rect">
-            <a:avLst/>
-          </a:prstGeom>
-          <a:noFill/>
-        </p:spPr>
-        <p:txBody>
-          <a:bodyPr wrap="none" lIns="0" rIns="0">
-            <a:noAutofit/>
-          </a:bodyPr>
-          <a:lstStyle/>
-          <a:p>
-            <a:pPr algn="l"/>
-            <a:r>
-              <a:rPr sz="3400" b="1" i="0">
-                <a:solidFill>
-                  <a:srgbClr val="0A2240"/>
-                </a:solidFill>
-                <a:latin typeface="Arial"/>
-              </a:rPr>
-              <a:t>Security</a:t>
-            </a:r>
-          </a:p>
-        </p:txBody>
-      </p:sp>
-      <p:sp>
-        <p:nvSpPr>
-          <p:cNvPr id="9" name="TextBox 8"/>
-          <p:cNvSpPr/>
-          <p:nvPr>
-            <p:ph type="body" idx="4"/>
-          </p:nvPr>
-        </p:nvSpPr>
-        <p:spPr>
-          <a:xfrm>
-            <a:off x="3345180" y="2154935"/>
-            <a:ext cx="2613660" cy="3605785"/>
-          </a:xfrm>
-          <a:prstGeom prst="rect">
-            <a:avLst/>
-          </a:prstGeom>
-          <a:noFill/>
-        </p:spPr>
-        <p:txBody>
-          <a:bodyPr wrap="square" lIns="0" rIns="0">
-            <a:noAutofit/>
-          </a:bodyPr>
-          <a:lstStyle/>
-          <a:p>
-            <a:pPr algn="l"/>
-            <a:r>
-              <a:rPr sz="3400" b="0" i="0">
-                <a:solidFill>
-                  <a:srgbClr val="0A2240"/>
-                </a:solidFill>
-                <a:latin typeface="Arial"/>
-              </a:rPr>
-              <a:t>Zero-trust, SOC 2 ready.</a:t>
-            </a:r>
-          </a:p>
-        </p:txBody>
-      </p:sp>
-      <p:sp>
-        <p:nvSpPr>
-          <p:cNvPr id="10" name="TextBox 9"/>
-          <p:cNvSpPr/>
-          <p:nvPr>
-            <p:ph type="body" idx="5"/>
-          </p:nvPr>
-        </p:nvSpPr>
-        <p:spPr>
-          <a:xfrm>
-            <a:off x="6233160" y="1499616"/>
-            <a:ext cx="2613660" cy="518159"/>
-          </a:xfrm>
-          <a:prstGeom prst="rect">
-            <a:avLst/>
-          </a:prstGeom>
-          <a:noFill/>
-        </p:spPr>
-        <p:txBody>
-          <a:bodyPr wrap="none" lIns="0" rIns="0">
-            <a:noAutofit/>
-          </a:bodyPr>
-          <a:lstStyle/>
-          <a:p>
-            <a:pPr algn="l"/>
-            <a:r>
-              <a:rPr sz="3400" b="1" i="0">
-                <a:solidFill>
-                  <a:srgbClr val="0A2240"/>
-                </a:solidFill>
-                <a:latin typeface="Arial"/>
-              </a:rPr>
-              <a:t>Speed</a:t>
-            </a:r>
-          </a:p>
-        </p:txBody>
-      </p:sp>
-      <p:sp>
-        <p:nvSpPr>
-          <p:cNvPr id="11" name="TextBox 10"/>
-          <p:cNvSpPr/>
-          <p:nvPr>
-            <p:ph type="body" idx="6"/>
-          </p:nvPr>
-        </p:nvSpPr>
-        <p:spPr>
-          <a:xfrm>
-            <a:off x="6233160" y="2154935"/>
-            <a:ext cx="2613660" cy="3605785"/>
-          </a:xfrm>
-          <a:prstGeom prst="rect">
-            <a:avLst/>
-          </a:prstGeom>
-          <a:noFill/>
-        </p:spPr>
-        <p:txBody>
-          <a:bodyPr wrap="square" lIns="0" rIns="0">
-            <a:noAutofit/>
-          </a:bodyPr>
-          <a:lstStyle/>
-          <a:p>
-            <a:pPr algn="l"/>
-            <a:r>
-              <a:rPr sz="3400" b="0" i="0">
-                <a:solidFill>
-                  <a:srgbClr val="0A2240"/>
-                </a:solidFill>
-                <a:latin typeface="Arial"/>
-              </a:rPr>
-              <a:t>Sub-100ms p99 latency.</a:t>
-            </a:r>
-          </a:p>
-        </p:txBody>
-      </p:sp>
-      <p:sp>
-        <p:nvSpPr>
-          <p:cNvPr id="12" name="TextBox 11"/>
-          <p:cNvSpPr/>
-          <p:nvPr>
-            <p:ph type="body" idx="7"/>
-          </p:nvPr>
-        </p:nvSpPr>
-        <p:spPr>
-          <a:xfrm>
-            <a:off x="9121140" y="1499616"/>
-            <a:ext cx="2613660" cy="518159"/>
-          </a:xfrm>
-          <a:prstGeom prst="rect">
-            <a:avLst/>
-          </a:prstGeom>
-          <a:noFill/>
-        </p:spPr>
-        <p:txBody>
-          <a:bodyPr wrap="none" lIns="0" rIns="0">
-            <a:noAutofit/>
-          </a:bodyPr>
-          <a:lstStyle/>
-          <a:p>
-            <a:pPr algn="l"/>
-            <a:r>
-              <a:rPr sz="3400" b="1" i="0">
-                <a:solidFill>
-                  <a:srgbClr val="0A2240"/>
-                </a:solidFill>
-                <a:latin typeface="Arial"/>
-              </a:rPr>
-              <a:t>APIs</a:t>
-            </a:r>
-          </a:p>
-        </p:txBody>
-      </p:sp>
-      <p:sp>
-        <p:nvSpPr>
-          <p:cNvPr id="13" name="TextBox 12"/>
-          <p:cNvSpPr/>
-          <p:nvPr>
-            <p:ph type="body" idx="8"/>
-          </p:nvPr>
-        </p:nvSpPr>
-        <p:spPr>
-          <a:xfrm>
-            <a:off x="9121140" y="2154935"/>
-            <a:ext cx="2613660" cy="3605785"/>
-          </a:xfrm>
-          <a:prstGeom prst="rect">
-            <a:avLst/>
-          </a:prstGeom>
-          <a:noFill/>
-        </p:spPr>
-        <p:txBody>
-          <a:bodyPr wrap="square" lIns="0" rIns="0">
-            <a:noAutofit/>
-          </a:bodyPr>
-          <a:lstStyle/>
-          <a:p>
-            <a:pPr algn="l"/>
-            <a:r>
-              <a:rPr sz="3400" b="0" i="0">
-                <a:solidFill>
-                  <a:srgbClr val="0A2240"/>
-                </a:solidFill>
-                <a:latin typeface="Arial"/>
-              </a:rPr>
-              <a:t>300+ open connectors.</a:t>
-            </a:r>
-          </a:p>
-        </p:txBody>
-      </p:sp>
-    </p:spTree>
-    <p:extLst>
-      <p:ext uri="{BB962C8B-B14F-4D97-AF65-F5344CB8AC3E}">
-        <p14:creationId xmlns:p14="http://schemas.microsoft.com/office/powerpoint/2010/main" val="1212999818"/>
-      </p:ext>
-    </p:extLst>
-  </p:cSld>
-  <p:clrMapOvr>
-    <a:masterClrMapping/>
-  </p:clrMapOvr>
-</p:sldLayout>
-</file>
-
-<file path=ppt/slideLayouts/slideLayout19.xml><?xml version="1.0" encoding="utf-8"?>
 <p:sldLayout xmlns:a="http://schemas.openxmlformats.org/drawingml/2006/main" xmlns:r="http://schemas.openxmlformats.org/officeDocument/2006/relationships" xmlns:p="http://schemas.openxmlformats.org/presentationml/2006/main" type="blank" preserve="1">
   <p:cSld name="slidekit · Section Divider">
     <p:bg>
@@ -4827,6 +4357,511 @@
                 <a:latin typeface="Arial"/>
               </a:rPr>
               <a:t>Where We Stand Today</a:t>
+            </a:r>
+          </a:p>
+        </p:txBody>
+      </p:sp>
+    </p:spTree>
+    <p:extLst>
+      <p:ext uri="{BB962C8B-B14F-4D97-AF65-F5344CB8AC3E}">
+        <p14:creationId xmlns:p14="http://schemas.microsoft.com/office/powerpoint/2010/main" val="1212999818"/>
+      </p:ext>
+    </p:extLst>
+  </p:cSld>
+  <p:clrMapOvr>
+    <a:masterClrMapping/>
+  </p:clrMapOvr>
+</p:sldLayout>
+</file>
+
+<file path=ppt/slideLayouts/slideLayout19.xml><?xml version="1.0" encoding="utf-8"?>
+<p:sldLayout xmlns:a="http://schemas.openxmlformats.org/drawingml/2006/main" xmlns:r="http://schemas.openxmlformats.org/officeDocument/2006/relationships" xmlns:p="http://schemas.openxmlformats.org/presentationml/2006/main" type="blank" preserve="1">
+  <p:cSld name="slidekit · Agenda">
+    <p:bg>
+      <p:bgPr>
+        <a:solidFill>
+          <a:srgbClr val="FFFFFF"/>
+        </a:solidFill>
+        <a:effectLst/>
+      </p:bgPr>
+    </p:bg>
+    <p:spTree>
+      <p:nvGrpSpPr>
+        <p:cNvPr id="1" name=""/>
+        <p:cNvGrpSpPr/>
+        <p:nvPr/>
+      </p:nvGrpSpPr>
+      <p:grpSpPr>
+        <a:xfrm>
+          <a:off x="0" y="0"/>
+          <a:ext cx="0" cy="0"/>
+          <a:chOff x="0" y="0"/>
+          <a:chExt cx="0" cy="0"/>
+        </a:xfrm>
+      </p:grpSpPr>
+      <p:sp>
+        <p:nvSpPr>
+          <p:cNvPr id="4" name="Slide Number Placeholder 3"/>
+          <p:cNvSpPr>
+            <a:spLocks noGrp="1"/>
+          </p:cNvSpPr>
+          <p:nvPr>
+            <p:ph type="sldNum" sz="quarter" idx="12"/>
+          </p:nvPr>
+        </p:nvSpPr>
+        <p:spPr>
+          <a:xfrm>
+            <a:off x="11186160" y="6035040"/>
+            <a:ext cx="548640" cy="365760"/>
+          </a:xfrm>
+        </p:spPr>
+        <p:txBody>
+          <a:bodyPr/>
+          <a:lstStyle/>
+          <a:p>
+            <a:fld id="{C1FF6DA9-008F-8B48-92A6-B652298478BF}" type="slidenum">
+              <a:rPr lang="en-US" smtClean="0"/>
+              <a:t>‹#›</a:t>
+            </a:fld>
+            <a:endParaRPr lang="en-US"/>
+          </a:p>
+        </p:txBody>
+      </p:sp>
+      <p:sp>
+        <p:nvSpPr>
+          <p:cNvPr id="5" name="TextBox 4"/>
+          <p:cNvSpPr/>
+          <p:nvPr>
+            <p:ph type="title"/>
+          </p:nvPr>
+        </p:nvSpPr>
+        <p:spPr>
+          <a:xfrm>
+            <a:off x="457200" y="457200"/>
+            <a:ext cx="11277600" cy="768096"/>
+          </a:xfrm>
+          <a:prstGeom prst="rect">
+            <a:avLst/>
+          </a:prstGeom>
+          <a:noFill/>
+        </p:spPr>
+        <p:txBody>
+          <a:bodyPr wrap="none" lIns="0" rIns="0">
+            <a:noAutofit/>
+          </a:bodyPr>
+          <a:lstStyle/>
+          <a:p>
+            <a:pPr algn="l"/>
+            <a:r>
+              <a:rPr sz="4200" b="1" i="0">
+                <a:solidFill>
+                  <a:srgbClr val="0072CE"/>
+                </a:solidFill>
+                <a:latin typeface="Arial"/>
+              </a:rPr>
+              <a:t>What We Will Cover</a:t>
+            </a:r>
+          </a:p>
+        </p:txBody>
+      </p:sp>
+      <p:sp>
+        <p:nvSpPr>
+          <p:cNvPr id="6" name="Rectangle 5"/>
+          <p:cNvSpPr/>
+          <p:nvPr>
+            <p:ph type="body" idx="1"/>
+          </p:nvPr>
+        </p:nvSpPr>
+        <p:spPr>
+          <a:xfrm>
+            <a:off x="457200" y="1280160"/>
+            <a:ext cx="11277600" cy="64008"/>
+          </a:xfrm>
+          <a:prstGeom prst="rect">
+            <a:avLst/>
+          </a:prstGeom>
+          <a:solidFill>
+            <a:srgbClr val="0072CE"/>
+          </a:solidFill>
+          <a:ln>
+            <a:noFill/>
+          </a:ln>
+          <a:effectLst/>
+        </p:spPr>
+        <p:txBody>
+          <a:bodyPr rtlCol="0" anchor="ctr"/>
+          <a:lstStyle/>
+          <a:p>
+            <a:pPr algn="ctr"/>
+          </a:p>
+        </p:txBody>
+      </p:sp>
+      <p:sp>
+        <p:nvSpPr>
+          <p:cNvPr id="7" name="TextBox 6"/>
+          <p:cNvSpPr/>
+          <p:nvPr>
+            <p:ph type="body" idx="2"/>
+          </p:nvPr>
+        </p:nvSpPr>
+        <p:spPr>
+          <a:xfrm>
+            <a:off x="457200" y="1618488"/>
+            <a:ext cx="951348" cy="518159"/>
+          </a:xfrm>
+          <a:prstGeom prst="rect">
+            <a:avLst/>
+          </a:prstGeom>
+          <a:noFill/>
+        </p:spPr>
+        <p:txBody>
+          <a:bodyPr wrap="none" lIns="0" rIns="0">
+            <a:noAutofit/>
+          </a:bodyPr>
+          <a:lstStyle/>
+          <a:p>
+            <a:pPr algn="l"/>
+            <a:r>
+              <a:rPr sz="3400" b="1" i="0">
+                <a:solidFill>
+                  <a:srgbClr val="0072CE"/>
+                </a:solidFill>
+                <a:latin typeface="Arial"/>
+              </a:rPr>
+              <a:t>01</a:t>
+            </a:r>
+          </a:p>
+        </p:txBody>
+      </p:sp>
+      <p:sp>
+        <p:nvSpPr>
+          <p:cNvPr id="8" name="TextBox 7"/>
+          <p:cNvSpPr/>
+          <p:nvPr>
+            <p:ph type="body" idx="3"/>
+          </p:nvPr>
+        </p:nvSpPr>
+        <p:spPr>
+          <a:xfrm>
+            <a:off x="1371600" y="1618488"/>
+            <a:ext cx="10363200" cy="518159"/>
+          </a:xfrm>
+          <a:prstGeom prst="rect">
+            <a:avLst/>
+          </a:prstGeom>
+          <a:noFill/>
+        </p:spPr>
+        <p:txBody>
+          <a:bodyPr wrap="none" lIns="0" rIns="0">
+            <a:noAutofit/>
+          </a:bodyPr>
+          <a:lstStyle/>
+          <a:p>
+            <a:pPr algn="l"/>
+            <a:r>
+              <a:rPr sz="3400" b="0" i="0">
+                <a:solidFill>
+                  <a:srgbClr val="0A2240"/>
+                </a:solidFill>
+                <a:latin typeface="Arial"/>
+              </a:rPr>
+              <a:t>Performance against targets</a:t>
+            </a:r>
+          </a:p>
+        </p:txBody>
+      </p:sp>
+      <p:sp>
+        <p:nvSpPr>
+          <p:cNvPr id="9" name="TextBox 8"/>
+          <p:cNvSpPr/>
+          <p:nvPr>
+            <p:ph type="body" idx="4"/>
+          </p:nvPr>
+        </p:nvSpPr>
+        <p:spPr>
+          <a:xfrm>
+            <a:off x="457200" y="2501798"/>
+            <a:ext cx="951348" cy="518159"/>
+          </a:xfrm>
+          <a:prstGeom prst="rect">
+            <a:avLst/>
+          </a:prstGeom>
+          <a:noFill/>
+        </p:spPr>
+        <p:txBody>
+          <a:bodyPr wrap="none" lIns="0" rIns="0">
+            <a:noAutofit/>
+          </a:bodyPr>
+          <a:lstStyle/>
+          <a:p>
+            <a:pPr algn="l"/>
+            <a:r>
+              <a:rPr sz="3400" b="1" i="0">
+                <a:solidFill>
+                  <a:srgbClr val="0072CE"/>
+                </a:solidFill>
+                <a:latin typeface="Arial"/>
+              </a:rPr>
+              <a:t>02</a:t>
+            </a:r>
+          </a:p>
+        </p:txBody>
+      </p:sp>
+      <p:sp>
+        <p:nvSpPr>
+          <p:cNvPr id="10" name="TextBox 9"/>
+          <p:cNvSpPr/>
+          <p:nvPr>
+            <p:ph type="body" idx="5"/>
+          </p:nvPr>
+        </p:nvSpPr>
+        <p:spPr>
+          <a:xfrm>
+            <a:off x="1371600" y="2501798"/>
+            <a:ext cx="10363200" cy="518159"/>
+          </a:xfrm>
+          <a:prstGeom prst="rect">
+            <a:avLst/>
+          </a:prstGeom>
+          <a:noFill/>
+        </p:spPr>
+        <p:txBody>
+          <a:bodyPr wrap="none" lIns="0" rIns="0">
+            <a:noAutofit/>
+          </a:bodyPr>
+          <a:lstStyle/>
+          <a:p>
+            <a:pPr algn="l"/>
+            <a:r>
+              <a:rPr sz="3400" b="0" i="0">
+                <a:solidFill>
+                  <a:srgbClr val="0A2240"/>
+                </a:solidFill>
+                <a:latin typeface="Arial"/>
+              </a:rPr>
+              <a:t>Customer and market signals</a:t>
+            </a:r>
+          </a:p>
+        </p:txBody>
+      </p:sp>
+      <p:sp>
+        <p:nvSpPr>
+          <p:cNvPr id="11" name="TextBox 10"/>
+          <p:cNvSpPr/>
+          <p:nvPr>
+            <p:ph type="body" idx="6"/>
+          </p:nvPr>
+        </p:nvSpPr>
+        <p:spPr>
+          <a:xfrm>
+            <a:off x="457200" y="3385108"/>
+            <a:ext cx="951348" cy="518159"/>
+          </a:xfrm>
+          <a:prstGeom prst="rect">
+            <a:avLst/>
+          </a:prstGeom>
+          <a:noFill/>
+        </p:spPr>
+        <p:txBody>
+          <a:bodyPr wrap="none" lIns="0" rIns="0">
+            <a:noAutofit/>
+          </a:bodyPr>
+          <a:lstStyle/>
+          <a:p>
+            <a:pPr algn="l"/>
+            <a:r>
+              <a:rPr sz="3400" b="1" i="0">
+                <a:solidFill>
+                  <a:srgbClr val="0072CE"/>
+                </a:solidFill>
+                <a:latin typeface="Arial"/>
+              </a:rPr>
+              <a:t>03</a:t>
+            </a:r>
+          </a:p>
+        </p:txBody>
+      </p:sp>
+      <p:sp>
+        <p:nvSpPr>
+          <p:cNvPr id="12" name="TextBox 11"/>
+          <p:cNvSpPr/>
+          <p:nvPr>
+            <p:ph type="body" idx="7"/>
+          </p:nvPr>
+        </p:nvSpPr>
+        <p:spPr>
+          <a:xfrm>
+            <a:off x="1371600" y="3385108"/>
+            <a:ext cx="10363200" cy="518159"/>
+          </a:xfrm>
+          <a:prstGeom prst="rect">
+            <a:avLst/>
+          </a:prstGeom>
+          <a:noFill/>
+        </p:spPr>
+        <p:txBody>
+          <a:bodyPr wrap="none" lIns="0" rIns="0">
+            <a:noAutofit/>
+          </a:bodyPr>
+          <a:lstStyle/>
+          <a:p>
+            <a:pPr algn="l"/>
+            <a:r>
+              <a:rPr sz="3400" b="0" i="0">
+                <a:solidFill>
+                  <a:srgbClr val="0A2240"/>
+                </a:solidFill>
+                <a:latin typeface="Arial"/>
+              </a:rPr>
+              <a:t>Operational health and risks</a:t>
+            </a:r>
+          </a:p>
+        </p:txBody>
+      </p:sp>
+      <p:sp>
+        <p:nvSpPr>
+          <p:cNvPr id="13" name="TextBox 12"/>
+          <p:cNvSpPr/>
+          <p:nvPr>
+            <p:ph type="body" idx="8"/>
+          </p:nvPr>
+        </p:nvSpPr>
+        <p:spPr>
+          <a:xfrm>
+            <a:off x="457200" y="4268418"/>
+            <a:ext cx="951348" cy="518159"/>
+          </a:xfrm>
+          <a:prstGeom prst="rect">
+            <a:avLst/>
+          </a:prstGeom>
+          <a:noFill/>
+        </p:spPr>
+        <p:txBody>
+          <a:bodyPr wrap="none" lIns="0" rIns="0">
+            <a:noAutofit/>
+          </a:bodyPr>
+          <a:lstStyle/>
+          <a:p>
+            <a:pPr algn="l"/>
+            <a:r>
+              <a:rPr sz="3400" b="1" i="0">
+                <a:solidFill>
+                  <a:srgbClr val="0072CE"/>
+                </a:solidFill>
+                <a:latin typeface="Arial"/>
+              </a:rPr>
+              <a:t>04</a:t>
+            </a:r>
+          </a:p>
+        </p:txBody>
+      </p:sp>
+      <p:sp>
+        <p:nvSpPr>
+          <p:cNvPr id="14" name="TextBox 13"/>
+          <p:cNvSpPr/>
+          <p:nvPr>
+            <p:ph type="body" idx="9"/>
+          </p:nvPr>
+        </p:nvSpPr>
+        <p:spPr>
+          <a:xfrm>
+            <a:off x="1371600" y="4268418"/>
+            <a:ext cx="10363200" cy="518159"/>
+          </a:xfrm>
+          <a:prstGeom prst="rect">
+            <a:avLst/>
+          </a:prstGeom>
+          <a:noFill/>
+        </p:spPr>
+        <p:txBody>
+          <a:bodyPr wrap="none" lIns="0" rIns="0">
+            <a:noAutofit/>
+          </a:bodyPr>
+          <a:lstStyle/>
+          <a:p>
+            <a:pPr algn="l"/>
+            <a:r>
+              <a:rPr sz="3400" b="0" i="0">
+                <a:solidFill>
+                  <a:srgbClr val="0A2240"/>
+                </a:solidFill>
+                <a:latin typeface="Arial"/>
+              </a:rPr>
+              <a:t>Roadmap for next quarter</a:t>
+            </a:r>
+          </a:p>
+        </p:txBody>
+      </p:sp>
+      <p:sp>
+        <p:nvSpPr>
+          <p:cNvPr id="15" name="TextBox 14"/>
+          <p:cNvSpPr/>
+          <p:nvPr>
+            <p:ph type="body" idx="13"/>
+          </p:nvPr>
+        </p:nvSpPr>
+        <p:spPr>
+          <a:xfrm>
+            <a:off x="457200" y="5151728"/>
+            <a:ext cx="951348" cy="518159"/>
+          </a:xfrm>
+          <a:prstGeom prst="rect">
+            <a:avLst/>
+          </a:prstGeom>
+          <a:noFill/>
+        </p:spPr>
+        <p:txBody>
+          <a:bodyPr wrap="none" lIns="0" rIns="0">
+            <a:noAutofit/>
+          </a:bodyPr>
+          <a:lstStyle/>
+          <a:p>
+            <a:pPr algn="l"/>
+            <a:r>
+              <a:rPr sz="3400" b="1" i="0">
+                <a:solidFill>
+                  <a:srgbClr val="0072CE"/>
+                </a:solidFill>
+                <a:latin typeface="Arial"/>
+              </a:rPr>
+              <a:t>05</a:t>
+            </a:r>
+          </a:p>
+        </p:txBody>
+      </p:sp>
+      <p:sp>
+        <p:nvSpPr>
+          <p:cNvPr id="16" name="TextBox 15"/>
+          <p:cNvSpPr/>
+          <p:nvPr>
+            <p:ph type="body" idx="14"/>
+          </p:nvPr>
+        </p:nvSpPr>
+        <p:spPr>
+          <a:xfrm>
+            <a:off x="1371600" y="5151728"/>
+            <a:ext cx="10363200" cy="518159"/>
+          </a:xfrm>
+          <a:prstGeom prst="rect">
+            <a:avLst/>
+          </a:prstGeom>
+          <a:noFill/>
+        </p:spPr>
+        <p:txBody>
+          <a:bodyPr wrap="none" lIns="0" rIns="0">
+            <a:noAutofit/>
+          </a:bodyPr>
+          <a:lstStyle/>
+          <a:p>
+            <a:pPr algn="l"/>
+            <a:r>
+              <a:rPr sz="3400" b="0" i="0">
+                <a:solidFill>
+                  <a:srgbClr val="0A2240"/>
+                </a:solidFill>
+                <a:latin typeface="Arial"/>
+              </a:rPr>
+              <a:t>Decisions we need today</a:t>
             </a:r>
           </a:p>
         </p:txBody>
@@ -5016,511 +5051,6 @@
 
 <file path=ppt/slideLayouts/slideLayout20.xml><?xml version="1.0" encoding="utf-8"?>
 <p:sldLayout xmlns:a="http://schemas.openxmlformats.org/drawingml/2006/main" xmlns:r="http://schemas.openxmlformats.org/officeDocument/2006/relationships" xmlns:p="http://schemas.openxmlformats.org/presentationml/2006/main" type="blank" preserve="1">
-  <p:cSld name="slidekit · Agenda">
-    <p:bg>
-      <p:bgPr>
-        <a:solidFill>
-          <a:srgbClr val="FFFFFF"/>
-        </a:solidFill>
-        <a:effectLst/>
-      </p:bgPr>
-    </p:bg>
-    <p:spTree>
-      <p:nvGrpSpPr>
-        <p:cNvPr id="1" name=""/>
-        <p:cNvGrpSpPr/>
-        <p:nvPr/>
-      </p:nvGrpSpPr>
-      <p:grpSpPr>
-        <a:xfrm>
-          <a:off x="0" y="0"/>
-          <a:ext cx="0" cy="0"/>
-          <a:chOff x="0" y="0"/>
-          <a:chExt cx="0" cy="0"/>
-        </a:xfrm>
-      </p:grpSpPr>
-      <p:sp>
-        <p:nvSpPr>
-          <p:cNvPr id="4" name="Slide Number Placeholder 3"/>
-          <p:cNvSpPr>
-            <a:spLocks noGrp="1"/>
-          </p:cNvSpPr>
-          <p:nvPr>
-            <p:ph type="sldNum" sz="quarter" idx="12"/>
-          </p:nvPr>
-        </p:nvSpPr>
-        <p:spPr>
-          <a:xfrm>
-            <a:off x="11186160" y="6035040"/>
-            <a:ext cx="548640" cy="365760"/>
-          </a:xfrm>
-        </p:spPr>
-        <p:txBody>
-          <a:bodyPr/>
-          <a:lstStyle/>
-          <a:p>
-            <a:fld id="{C1FF6DA9-008F-8B48-92A6-B652298478BF}" type="slidenum">
-              <a:rPr lang="en-US" smtClean="0"/>
-              <a:t>‹#›</a:t>
-            </a:fld>
-            <a:endParaRPr lang="en-US"/>
-          </a:p>
-        </p:txBody>
-      </p:sp>
-      <p:sp>
-        <p:nvSpPr>
-          <p:cNvPr id="5" name="TextBox 4"/>
-          <p:cNvSpPr/>
-          <p:nvPr>
-            <p:ph type="title"/>
-          </p:nvPr>
-        </p:nvSpPr>
-        <p:spPr>
-          <a:xfrm>
-            <a:off x="457200" y="457200"/>
-            <a:ext cx="11277600" cy="768096"/>
-          </a:xfrm>
-          <a:prstGeom prst="rect">
-            <a:avLst/>
-          </a:prstGeom>
-          <a:noFill/>
-        </p:spPr>
-        <p:txBody>
-          <a:bodyPr wrap="none" lIns="0" rIns="0">
-            <a:noAutofit/>
-          </a:bodyPr>
-          <a:lstStyle/>
-          <a:p>
-            <a:pPr algn="l"/>
-            <a:r>
-              <a:rPr sz="4200" b="1" i="0">
-                <a:solidFill>
-                  <a:srgbClr val="0072CE"/>
-                </a:solidFill>
-                <a:latin typeface="Arial"/>
-              </a:rPr>
-              <a:t>What We Will Cover</a:t>
-            </a:r>
-          </a:p>
-        </p:txBody>
-      </p:sp>
-      <p:sp>
-        <p:nvSpPr>
-          <p:cNvPr id="6" name="Rectangle 5"/>
-          <p:cNvSpPr/>
-          <p:nvPr>
-            <p:ph type="body" idx="1"/>
-          </p:nvPr>
-        </p:nvSpPr>
-        <p:spPr>
-          <a:xfrm>
-            <a:off x="457200" y="1280160"/>
-            <a:ext cx="11277600" cy="64008"/>
-          </a:xfrm>
-          <a:prstGeom prst="rect">
-            <a:avLst/>
-          </a:prstGeom>
-          <a:solidFill>
-            <a:srgbClr val="0072CE"/>
-          </a:solidFill>
-          <a:ln>
-            <a:noFill/>
-          </a:ln>
-          <a:effectLst/>
-        </p:spPr>
-        <p:txBody>
-          <a:bodyPr rtlCol="0" anchor="ctr"/>
-          <a:lstStyle/>
-          <a:p>
-            <a:pPr algn="ctr"/>
-          </a:p>
-        </p:txBody>
-      </p:sp>
-      <p:sp>
-        <p:nvSpPr>
-          <p:cNvPr id="7" name="TextBox 6"/>
-          <p:cNvSpPr/>
-          <p:nvPr>
-            <p:ph type="body" idx="2"/>
-          </p:nvPr>
-        </p:nvSpPr>
-        <p:spPr>
-          <a:xfrm>
-            <a:off x="457200" y="1618488"/>
-            <a:ext cx="951348" cy="518159"/>
-          </a:xfrm>
-          <a:prstGeom prst="rect">
-            <a:avLst/>
-          </a:prstGeom>
-          <a:noFill/>
-        </p:spPr>
-        <p:txBody>
-          <a:bodyPr wrap="none" lIns="0" rIns="0">
-            <a:noAutofit/>
-          </a:bodyPr>
-          <a:lstStyle/>
-          <a:p>
-            <a:pPr algn="l"/>
-            <a:r>
-              <a:rPr sz="3400" b="1" i="0">
-                <a:solidFill>
-                  <a:srgbClr val="0072CE"/>
-                </a:solidFill>
-                <a:latin typeface="Arial"/>
-              </a:rPr>
-              <a:t>01</a:t>
-            </a:r>
-          </a:p>
-        </p:txBody>
-      </p:sp>
-      <p:sp>
-        <p:nvSpPr>
-          <p:cNvPr id="8" name="TextBox 7"/>
-          <p:cNvSpPr/>
-          <p:nvPr>
-            <p:ph type="body" idx="3"/>
-          </p:nvPr>
-        </p:nvSpPr>
-        <p:spPr>
-          <a:xfrm>
-            <a:off x="1371600" y="1618488"/>
-            <a:ext cx="10363200" cy="518159"/>
-          </a:xfrm>
-          <a:prstGeom prst="rect">
-            <a:avLst/>
-          </a:prstGeom>
-          <a:noFill/>
-        </p:spPr>
-        <p:txBody>
-          <a:bodyPr wrap="none" lIns="0" rIns="0">
-            <a:noAutofit/>
-          </a:bodyPr>
-          <a:lstStyle/>
-          <a:p>
-            <a:pPr algn="l"/>
-            <a:r>
-              <a:rPr sz="3400" b="0" i="0">
-                <a:solidFill>
-                  <a:srgbClr val="0A2240"/>
-                </a:solidFill>
-                <a:latin typeface="Arial"/>
-              </a:rPr>
-              <a:t>Performance against targets</a:t>
-            </a:r>
-          </a:p>
-        </p:txBody>
-      </p:sp>
-      <p:sp>
-        <p:nvSpPr>
-          <p:cNvPr id="9" name="TextBox 8"/>
-          <p:cNvSpPr/>
-          <p:nvPr>
-            <p:ph type="body" idx="4"/>
-          </p:nvPr>
-        </p:nvSpPr>
-        <p:spPr>
-          <a:xfrm>
-            <a:off x="457200" y="2501798"/>
-            <a:ext cx="951348" cy="518159"/>
-          </a:xfrm>
-          <a:prstGeom prst="rect">
-            <a:avLst/>
-          </a:prstGeom>
-          <a:noFill/>
-        </p:spPr>
-        <p:txBody>
-          <a:bodyPr wrap="none" lIns="0" rIns="0">
-            <a:noAutofit/>
-          </a:bodyPr>
-          <a:lstStyle/>
-          <a:p>
-            <a:pPr algn="l"/>
-            <a:r>
-              <a:rPr sz="3400" b="1" i="0">
-                <a:solidFill>
-                  <a:srgbClr val="0072CE"/>
-                </a:solidFill>
-                <a:latin typeface="Arial"/>
-              </a:rPr>
-              <a:t>02</a:t>
-            </a:r>
-          </a:p>
-        </p:txBody>
-      </p:sp>
-      <p:sp>
-        <p:nvSpPr>
-          <p:cNvPr id="10" name="TextBox 9"/>
-          <p:cNvSpPr/>
-          <p:nvPr>
-            <p:ph type="body" idx="5"/>
-          </p:nvPr>
-        </p:nvSpPr>
-        <p:spPr>
-          <a:xfrm>
-            <a:off x="1371600" y="2501798"/>
-            <a:ext cx="10363200" cy="518159"/>
-          </a:xfrm>
-          <a:prstGeom prst="rect">
-            <a:avLst/>
-          </a:prstGeom>
-          <a:noFill/>
-        </p:spPr>
-        <p:txBody>
-          <a:bodyPr wrap="none" lIns="0" rIns="0">
-            <a:noAutofit/>
-          </a:bodyPr>
-          <a:lstStyle/>
-          <a:p>
-            <a:pPr algn="l"/>
-            <a:r>
-              <a:rPr sz="3400" b="0" i="0">
-                <a:solidFill>
-                  <a:srgbClr val="0A2240"/>
-                </a:solidFill>
-                <a:latin typeface="Arial"/>
-              </a:rPr>
-              <a:t>Customer and market signals</a:t>
-            </a:r>
-          </a:p>
-        </p:txBody>
-      </p:sp>
-      <p:sp>
-        <p:nvSpPr>
-          <p:cNvPr id="11" name="TextBox 10"/>
-          <p:cNvSpPr/>
-          <p:nvPr>
-            <p:ph type="body" idx="6"/>
-          </p:nvPr>
-        </p:nvSpPr>
-        <p:spPr>
-          <a:xfrm>
-            <a:off x="457200" y="3385108"/>
-            <a:ext cx="951348" cy="518159"/>
-          </a:xfrm>
-          <a:prstGeom prst="rect">
-            <a:avLst/>
-          </a:prstGeom>
-          <a:noFill/>
-        </p:spPr>
-        <p:txBody>
-          <a:bodyPr wrap="none" lIns="0" rIns="0">
-            <a:noAutofit/>
-          </a:bodyPr>
-          <a:lstStyle/>
-          <a:p>
-            <a:pPr algn="l"/>
-            <a:r>
-              <a:rPr sz="3400" b="1" i="0">
-                <a:solidFill>
-                  <a:srgbClr val="0072CE"/>
-                </a:solidFill>
-                <a:latin typeface="Arial"/>
-              </a:rPr>
-              <a:t>03</a:t>
-            </a:r>
-          </a:p>
-        </p:txBody>
-      </p:sp>
-      <p:sp>
-        <p:nvSpPr>
-          <p:cNvPr id="12" name="TextBox 11"/>
-          <p:cNvSpPr/>
-          <p:nvPr>
-            <p:ph type="body" idx="7"/>
-          </p:nvPr>
-        </p:nvSpPr>
-        <p:spPr>
-          <a:xfrm>
-            <a:off x="1371600" y="3385108"/>
-            <a:ext cx="10363200" cy="518159"/>
-          </a:xfrm>
-          <a:prstGeom prst="rect">
-            <a:avLst/>
-          </a:prstGeom>
-          <a:noFill/>
-        </p:spPr>
-        <p:txBody>
-          <a:bodyPr wrap="none" lIns="0" rIns="0">
-            <a:noAutofit/>
-          </a:bodyPr>
-          <a:lstStyle/>
-          <a:p>
-            <a:pPr algn="l"/>
-            <a:r>
-              <a:rPr sz="3400" b="0" i="0">
-                <a:solidFill>
-                  <a:srgbClr val="0A2240"/>
-                </a:solidFill>
-                <a:latin typeface="Arial"/>
-              </a:rPr>
-              <a:t>Operational health and risks</a:t>
-            </a:r>
-          </a:p>
-        </p:txBody>
-      </p:sp>
-      <p:sp>
-        <p:nvSpPr>
-          <p:cNvPr id="13" name="TextBox 12"/>
-          <p:cNvSpPr/>
-          <p:nvPr>
-            <p:ph type="body" idx="8"/>
-          </p:nvPr>
-        </p:nvSpPr>
-        <p:spPr>
-          <a:xfrm>
-            <a:off x="457200" y="4268418"/>
-            <a:ext cx="951348" cy="518159"/>
-          </a:xfrm>
-          <a:prstGeom prst="rect">
-            <a:avLst/>
-          </a:prstGeom>
-          <a:noFill/>
-        </p:spPr>
-        <p:txBody>
-          <a:bodyPr wrap="none" lIns="0" rIns="0">
-            <a:noAutofit/>
-          </a:bodyPr>
-          <a:lstStyle/>
-          <a:p>
-            <a:pPr algn="l"/>
-            <a:r>
-              <a:rPr sz="3400" b="1" i="0">
-                <a:solidFill>
-                  <a:srgbClr val="0072CE"/>
-                </a:solidFill>
-                <a:latin typeface="Arial"/>
-              </a:rPr>
-              <a:t>04</a:t>
-            </a:r>
-          </a:p>
-        </p:txBody>
-      </p:sp>
-      <p:sp>
-        <p:nvSpPr>
-          <p:cNvPr id="14" name="TextBox 13"/>
-          <p:cNvSpPr/>
-          <p:nvPr>
-            <p:ph type="body" idx="9"/>
-          </p:nvPr>
-        </p:nvSpPr>
-        <p:spPr>
-          <a:xfrm>
-            <a:off x="1371600" y="4268418"/>
-            <a:ext cx="10363200" cy="518159"/>
-          </a:xfrm>
-          <a:prstGeom prst="rect">
-            <a:avLst/>
-          </a:prstGeom>
-          <a:noFill/>
-        </p:spPr>
-        <p:txBody>
-          <a:bodyPr wrap="none" lIns="0" rIns="0">
-            <a:noAutofit/>
-          </a:bodyPr>
-          <a:lstStyle/>
-          <a:p>
-            <a:pPr algn="l"/>
-            <a:r>
-              <a:rPr sz="3400" b="0" i="0">
-                <a:solidFill>
-                  <a:srgbClr val="0A2240"/>
-                </a:solidFill>
-                <a:latin typeface="Arial"/>
-              </a:rPr>
-              <a:t>Roadmap for next quarter</a:t>
-            </a:r>
-          </a:p>
-        </p:txBody>
-      </p:sp>
-      <p:sp>
-        <p:nvSpPr>
-          <p:cNvPr id="15" name="TextBox 14"/>
-          <p:cNvSpPr/>
-          <p:nvPr>
-            <p:ph type="body" idx="13"/>
-          </p:nvPr>
-        </p:nvSpPr>
-        <p:spPr>
-          <a:xfrm>
-            <a:off x="457200" y="5151728"/>
-            <a:ext cx="951348" cy="518159"/>
-          </a:xfrm>
-          <a:prstGeom prst="rect">
-            <a:avLst/>
-          </a:prstGeom>
-          <a:noFill/>
-        </p:spPr>
-        <p:txBody>
-          <a:bodyPr wrap="none" lIns="0" rIns="0">
-            <a:noAutofit/>
-          </a:bodyPr>
-          <a:lstStyle/>
-          <a:p>
-            <a:pPr algn="l"/>
-            <a:r>
-              <a:rPr sz="3400" b="1" i="0">
-                <a:solidFill>
-                  <a:srgbClr val="0072CE"/>
-                </a:solidFill>
-                <a:latin typeface="Arial"/>
-              </a:rPr>
-              <a:t>05</a:t>
-            </a:r>
-          </a:p>
-        </p:txBody>
-      </p:sp>
-      <p:sp>
-        <p:nvSpPr>
-          <p:cNvPr id="16" name="TextBox 15"/>
-          <p:cNvSpPr/>
-          <p:nvPr>
-            <p:ph type="body" idx="14"/>
-          </p:nvPr>
-        </p:nvSpPr>
-        <p:spPr>
-          <a:xfrm>
-            <a:off x="1371600" y="5151728"/>
-            <a:ext cx="10363200" cy="518159"/>
-          </a:xfrm>
-          <a:prstGeom prst="rect">
-            <a:avLst/>
-          </a:prstGeom>
-          <a:noFill/>
-        </p:spPr>
-        <p:txBody>
-          <a:bodyPr wrap="none" lIns="0" rIns="0">
-            <a:noAutofit/>
-          </a:bodyPr>
-          <a:lstStyle/>
-          <a:p>
-            <a:pPr algn="l"/>
-            <a:r>
-              <a:rPr sz="3400" b="0" i="0">
-                <a:solidFill>
-                  <a:srgbClr val="0A2240"/>
-                </a:solidFill>
-                <a:latin typeface="Arial"/>
-              </a:rPr>
-              <a:t>Decisions we need today</a:t>
-            </a:r>
-          </a:p>
-        </p:txBody>
-      </p:sp>
-    </p:spTree>
-    <p:extLst>
-      <p:ext uri="{BB962C8B-B14F-4D97-AF65-F5344CB8AC3E}">
-        <p14:creationId xmlns:p14="http://schemas.microsoft.com/office/powerpoint/2010/main" val="1212999818"/>
-      </p:ext>
-    </p:extLst>
-  </p:cSld>
-  <p:clrMapOvr>
-    <a:masterClrMapping/>
-  </p:clrMapOvr>
-</p:sldLayout>
-</file>
-
-<file path=ppt/slideLayouts/slideLayout21.xml><?xml version="1.0" encoding="utf-8"?>
-<p:sldLayout xmlns:a="http://schemas.openxmlformats.org/drawingml/2006/main" xmlns:r="http://schemas.openxmlformats.org/officeDocument/2006/relationships" xmlns:p="http://schemas.openxmlformats.org/presentationml/2006/main" type="blank" preserve="1">
   <p:cSld name="slidekit · Big Number">
     <p:bg>
       <p:bgPr>
@@ -5691,7 +5221,7 @@
 </p:sldLayout>
 </file>
 
-<file path=ppt/slideLayouts/slideLayout22.xml><?xml version="1.0" encoding="utf-8"?>
+<file path=ppt/slideLayouts/slideLayout21.xml><?xml version="1.0" encoding="utf-8"?>
 <p:sldLayout xmlns:a="http://schemas.openxmlformats.org/drawingml/2006/main" xmlns:r="http://schemas.openxmlformats.org/officeDocument/2006/relationships" xmlns:p="http://schemas.openxmlformats.org/presentationml/2006/main" type="blank" preserve="1">
   <p:cSld name="slidekit · Pull Quote">
     <p:bg>
@@ -5754,8 +5284,8 @@
         </p:nvSpPr>
         <p:spPr>
           <a:xfrm>
-            <a:off x="457200" y="2301240"/>
-            <a:ext cx="128016" cy="2255520"/>
+            <a:off x="457200" y="2621280"/>
+            <a:ext cx="128016" cy="1615440"/>
           </a:xfrm>
           <a:prstGeom prst="rect">
             <a:avLst/>
@@ -5786,16 +5316,16 @@
         </p:nvSpPr>
         <p:spPr>
           <a:xfrm>
-            <a:off x="996696" y="2301240"/>
-            <a:ext cx="10738104" cy="1371600"/>
-          </a:xfrm>
-          <a:prstGeom prst="rect">
-            <a:avLst/>
-          </a:prstGeom>
-          <a:noFill/>
-        </p:spPr>
-        <p:txBody>
-          <a:bodyPr wrap="square" lIns="0" rIns="0">
+            <a:off x="996696" y="2621280"/>
+            <a:ext cx="11195304" cy="731520"/>
+          </a:xfrm>
+          <a:prstGeom prst="rect">
+            <a:avLst/>
+          </a:prstGeom>
+          <a:noFill/>
+        </p:spPr>
+        <p:txBody>
+          <a:bodyPr wrap="none" lIns="0" rIns="0">
             <a:noAutofit/>
           </a:bodyPr>
           <a:lstStyle/>
@@ -5808,7 +5338,7 @@
                 </a:solidFill>
                 <a:latin typeface="Arial"/>
               </a:rPr>
-              <a:t>"We stopped buying tools and started buying outcomes."</a:t>
+              <a:t>"We buy outcomes, not tools."</a:t>
             </a:r>
           </a:p>
         </p:txBody>
@@ -5823,7 +5353,7 @@
         </p:nvSpPr>
         <p:spPr>
           <a:xfrm>
-            <a:off x="996696" y="3947160"/>
+            <a:off x="996696" y="3627120"/>
             <a:ext cx="11195304" cy="609600"/>
           </a:xfrm>
           <a:prstGeom prst="rect">
@@ -5841,7 +5371,7 @@
             <a:r>
               <a:rPr sz="3400" b="0" i="0">
                 <a:solidFill>
-                  <a:srgbClr val="5B6B82"/>
+                  <a:srgbClr val="0A2240"/>
                 </a:solidFill>
                 <a:latin typeface="Arial"/>
               </a:rPr>
@@ -5863,7 +5393,7 @@
 </p:sldLayout>
 </file>
 
-<file path=ppt/slideLayouts/slideLayout23.xml><?xml version="1.0" encoding="utf-8"?>
+<file path=ppt/slideLayouts/slideLayout22.xml><?xml version="1.0" encoding="utf-8"?>
 <p:sldLayout xmlns:a="http://schemas.openxmlformats.org/drawingml/2006/main" xmlns:r="http://schemas.openxmlformats.org/officeDocument/2006/relationships" xmlns:p="http://schemas.openxmlformats.org/presentationml/2006/main" type="blank" preserve="1">
   <p:cSld name="slidekit · Definition">
     <p:bg>
@@ -5926,8 +5456,8 @@
         </p:nvSpPr>
         <p:spPr>
           <a:xfrm>
-            <a:off x="457200" y="1965960"/>
-            <a:ext cx="128016" cy="2926080"/>
+            <a:off x="457200" y="2484120"/>
+            <a:ext cx="128016" cy="1889760"/>
           </a:xfrm>
           <a:prstGeom prst="rect">
             <a:avLst/>
@@ -5958,7 +5488,7 @@
         </p:nvSpPr>
         <p:spPr>
           <a:xfrm>
-            <a:off x="996696" y="1965960"/>
+            <a:off x="996696" y="2484120"/>
             <a:ext cx="11195304" cy="1005840"/>
           </a:xfrm>
           <a:prstGeom prst="rect">
@@ -5995,16 +5525,16 @@
         </p:nvSpPr>
         <p:spPr>
           <a:xfrm>
-            <a:off x="996696" y="3246120"/>
-            <a:ext cx="10738104" cy="1645920"/>
-          </a:xfrm>
-          <a:prstGeom prst="rect">
-            <a:avLst/>
-          </a:prstGeom>
-          <a:noFill/>
-        </p:spPr>
-        <p:txBody>
-          <a:bodyPr wrap="square" lIns="0" rIns="0">
+            <a:off x="996696" y="3764280"/>
+            <a:ext cx="11195304" cy="609600"/>
+          </a:xfrm>
+          <a:prstGeom prst="rect">
+            <a:avLst/>
+          </a:prstGeom>
+          <a:noFill/>
+        </p:spPr>
+        <p:txBody>
+          <a:bodyPr wrap="none" lIns="0" rIns="0">
             <a:noAutofit/>
           </a:bodyPr>
           <a:lstStyle/>
@@ -6017,7 +5547,7 @@
                 </a:solidFill>
                 <a:latin typeface="Arial"/>
               </a:rPr>
-              <a:t>The percentage of recurring revenue retained from existing customers over a period, including expansion and after churn.</a:t>
+              <a:t>Revenue kept from existing customers.</a:t>
             </a:r>
           </a:p>
         </p:txBody>
@@ -6035,7 +5565,7 @@
 </p:sldLayout>
 </file>
 
-<file path=ppt/slideLayouts/slideLayout24.xml><?xml version="1.0" encoding="utf-8"?>
+<file path=ppt/slideLayouts/slideLayout23.xml><?xml version="1.0" encoding="utf-8"?>
 <p:sldLayout xmlns:a="http://schemas.openxmlformats.org/drawingml/2006/main" xmlns:r="http://schemas.openxmlformats.org/officeDocument/2006/relationships" xmlns:p="http://schemas.openxmlformats.org/presentationml/2006/main" type="blank" preserve="1">
   <p:cSld name="slidekit · Question">
     <p:bg>
@@ -6098,8 +5628,8 @@
         </p:nvSpPr>
         <p:spPr>
           <a:xfrm>
-            <a:off x="457200" y="2011680"/>
-            <a:ext cx="128016" cy="2834640"/>
+            <a:off x="457200" y="2926080"/>
+            <a:ext cx="128016" cy="1005840"/>
           </a:xfrm>
           <a:prstGeom prst="rect">
             <a:avLst/>
@@ -6130,16 +5660,16 @@
         </p:nvSpPr>
         <p:spPr>
           <a:xfrm>
-            <a:off x="996696" y="2011680"/>
-            <a:ext cx="10738104" cy="2834640"/>
-          </a:xfrm>
-          <a:prstGeom prst="rect">
-            <a:avLst/>
-          </a:prstGeom>
-          <a:noFill/>
-        </p:spPr>
-        <p:txBody>
-          <a:bodyPr wrap="square" lIns="0" rIns="0">
+            <a:off x="996696" y="2926080"/>
+            <a:ext cx="11195304" cy="1005840"/>
+          </a:xfrm>
+          <a:prstGeom prst="rect">
+            <a:avLst/>
+          </a:prstGeom>
+          <a:noFill/>
+        </p:spPr>
+        <p:txBody>
+          <a:bodyPr wrap="none" lIns="0" rIns="0">
             <a:noAutofit/>
           </a:bodyPr>
           <a:lstStyle/>
@@ -6152,7 +5682,7 @@
                 </a:solidFill>
                 <a:latin typeface="Arial"/>
               </a:rPr>
-              <a:t>What would we build if we trusted our customers completely?</a:t>
+              <a:t>What if we trusted users?</a:t>
             </a:r>
           </a:p>
         </p:txBody>
@@ -6170,7 +5700,7 @@
 </p:sldLayout>
 </file>
 
-<file path=ppt/slideLayouts/slideLayout25.xml><?xml version="1.0" encoding="utf-8"?>
+<file path=ppt/slideLayouts/slideLayout24.xml><?xml version="1.0" encoding="utf-8"?>
 <p:sldLayout xmlns:a="http://schemas.openxmlformats.org/drawingml/2006/main" xmlns:r="http://schemas.openxmlformats.org/officeDocument/2006/relationships" xmlns:p="http://schemas.openxmlformats.org/presentationml/2006/main" type="blank" preserve="1">
   <p:cSld name="slidekit · Bullet List">
     <p:bg>
@@ -6384,7 +5914,7 @@
 </p:sldLayout>
 </file>
 
-<file path=ppt/slideLayouts/slideLayout26.xml><?xml version="1.0" encoding="utf-8"?>
+<file path=ppt/slideLayouts/slideLayout25.xml><?xml version="1.0" encoding="utf-8"?>
 <p:sldLayout xmlns:a="http://schemas.openxmlformats.org/drawingml/2006/main" xmlns:r="http://schemas.openxmlformats.org/officeDocument/2006/relationships" xmlns:p="http://schemas.openxmlformats.org/presentationml/2006/main" type="blank" preserve="1">
   <p:cSld name="slidekit · Code Block">
     <p:bg>
@@ -6454,7 +5984,7 @@
             <a:avLst/>
           </a:prstGeom>
           <a:solidFill>
-            <a:srgbClr val="FF5F56"/>
+            <a:srgbClr val="FFFFFF"/>
           </a:solidFill>
           <a:ln>
             <a:noFill/>
@@ -6486,7 +6016,7 @@
             <a:avLst/>
           </a:prstGeom>
           <a:solidFill>
-            <a:srgbClr val="FFBD2E"/>
+            <a:srgbClr val="FFFFFF"/>
           </a:solidFill>
           <a:ln>
             <a:noFill/>
@@ -6518,7 +6048,7 @@
             <a:avLst/>
           </a:prstGeom>
           <a:solidFill>
-            <a:srgbClr val="27C93F"/>
+            <a:srgbClr val="FFFFFF"/>
           </a:solidFill>
           <a:ln>
             <a:noFill/>
@@ -6561,7 +6091,7 @@
             <a:r>
               <a:rPr sz="4200" b="0" i="0">
                 <a:solidFill>
-                  <a:srgbClr val="D4D4D4"/>
+                  <a:srgbClr val="FFFFFF"/>
                 </a:solidFill>
                 <a:latin typeface="Arial"/>
               </a:rPr>
@@ -6598,7 +6128,7 @@
             <a:r>
               <a:rPr sz="3400" b="0" i="0">
                 <a:solidFill>
-                  <a:srgbClr val="6A9955"/>
+                  <a:srgbClr val="FFFFFF"/>
                 </a:solidFill>
                 <a:latin typeface="Arial"/>
               </a:rPr>
@@ -6655,7 +6185,7 @@
         <p:spPr>
           <a:xfrm>
             <a:off x="1057461" y="2356103"/>
-            <a:ext cx="302848" cy="518159"/>
+            <a:ext cx="2524382" cy="518159"/>
           </a:xfrm>
           <a:prstGeom prst="rect">
             <a:avLst/>
@@ -6672,11 +6202,11 @@
             <a:r>
               <a:rPr sz="3400" b="0" i="0">
                 <a:solidFill>
-                  <a:srgbClr val="D4D4D4"/>
-                </a:solidFill>
-                <a:latin typeface="Arial"/>
-              </a:rPr>
-              <a:t> </a:t>
+                  <a:srgbClr val="FFFFFF"/>
+                </a:solidFill>
+                <a:latin typeface="Arial"/>
+              </a:rPr>
+              <a:t> main():</a:t>
             </a:r>
           </a:p>
         </p:txBody>
@@ -6691,8 +6221,8 @@
         </p:nvSpPr>
         <p:spPr>
           <a:xfrm>
-            <a:off x="1177429" y="2356103"/>
-            <a:ext cx="1680348" cy="518159"/>
+            <a:off x="457200" y="2874262"/>
+            <a:ext cx="7046475" cy="518159"/>
           </a:xfrm>
           <a:prstGeom prst="rect">
             <a:avLst/>
@@ -6709,11 +6239,11 @@
             <a:r>
               <a:rPr sz="3400" b="0" i="0">
                 <a:solidFill>
-                  <a:srgbClr val="DCDCAA"/>
-                </a:solidFill>
-                <a:latin typeface="Arial"/>
-              </a:rPr>
-              <a:t>main</a:t>
+                  <a:srgbClr val="FFFFFF"/>
+                </a:solidFill>
+                <a:latin typeface="Arial"/>
+              </a:rPr>
+              <a:t>    print("Hello, world!")</a:t>
             </a:r>
           </a:p>
         </p:txBody>
@@ -6728,8 +6258,8 @@
         </p:nvSpPr>
         <p:spPr>
           <a:xfrm>
-            <a:off x="2113347" y="2356103"/>
-            <a:ext cx="834964" cy="518159"/>
+            <a:off x="457200" y="3910580"/>
+            <a:ext cx="2140486" cy="518159"/>
           </a:xfrm>
           <a:prstGeom prst="rect">
             <a:avLst/>
@@ -6746,11 +6276,11 @@
             <a:r>
               <a:rPr sz="3400" b="0" i="0">
                 <a:solidFill>
-                  <a:srgbClr val="D4D4D4"/>
-                </a:solidFill>
-                <a:latin typeface="Arial"/>
-              </a:rPr>
-              <a:t>():</a:t>
+                  <a:srgbClr val="FFFFFF"/>
+                </a:solidFill>
+                <a:latin typeface="Arial"/>
+              </a:rPr>
+              <a:t>main()</a:t>
             </a:r>
           </a:p>
         </p:txBody>
@@ -6761,265 +6291,6 @@
           <p:cNvSpPr/>
           <p:nvPr>
             <p:ph type="body" idx="13"/>
-          </p:nvPr>
-        </p:nvSpPr>
-        <p:spPr>
-          <a:xfrm>
-            <a:off x="457200" y="2874262"/>
-            <a:ext cx="662751" cy="518159"/>
-          </a:xfrm>
-          <a:prstGeom prst="rect">
-            <a:avLst/>
-          </a:prstGeom>
-          <a:noFill/>
-        </p:spPr>
-        <p:txBody>
-          <a:bodyPr wrap="none" lIns="0" rIns="0">
-            <a:noAutofit/>
-          </a:bodyPr>
-          <a:lstStyle/>
-          <a:p>
-            <a:pPr algn="l"/>
-            <a:r>
-              <a:rPr sz="3400" b="0" i="0">
-                <a:solidFill>
-                  <a:srgbClr val="D4D4D4"/>
-                </a:solidFill>
-                <a:latin typeface="Arial"/>
-              </a:rPr>
-              <a:t>    </a:t>
-            </a:r>
-          </a:p>
-        </p:txBody>
-      </p:sp>
-      <p:sp>
-        <p:nvSpPr>
-          <p:cNvPr id="15" name="TextBox 14"/>
-          <p:cNvSpPr/>
-          <p:nvPr>
-            <p:ph type="body" idx="14"/>
-          </p:nvPr>
-        </p:nvSpPr>
-        <p:spPr>
-          <a:xfrm>
-            <a:off x="937071" y="2874262"/>
-            <a:ext cx="1526857" cy="518159"/>
-          </a:xfrm>
-          <a:prstGeom prst="rect">
-            <a:avLst/>
-          </a:prstGeom>
-          <a:noFill/>
-        </p:spPr>
-        <p:txBody>
-          <a:bodyPr wrap="none" lIns="0" rIns="0">
-            <a:noAutofit/>
-          </a:bodyPr>
-          <a:lstStyle/>
-          <a:p>
-            <a:pPr algn="l"/>
-            <a:r>
-              <a:rPr sz="3400" b="0" i="0">
-                <a:solidFill>
-                  <a:srgbClr val="DCDCAA"/>
-                </a:solidFill>
-                <a:latin typeface="Arial"/>
-              </a:rPr>
-              <a:t>print</a:t>
-            </a:r>
-          </a:p>
-        </p:txBody>
-      </p:sp>
-      <p:sp>
-        <p:nvSpPr>
-          <p:cNvPr id="16" name="TextBox 15"/>
-          <p:cNvSpPr/>
-          <p:nvPr>
-            <p:ph type="body" idx="15"/>
-          </p:nvPr>
-        </p:nvSpPr>
-        <p:spPr>
-          <a:xfrm>
-            <a:off x="1777057" y="2874262"/>
-            <a:ext cx="412948" cy="518159"/>
-          </a:xfrm>
-          <a:prstGeom prst="rect">
-            <a:avLst/>
-          </a:prstGeom>
-          <a:noFill/>
-        </p:spPr>
-        <p:txBody>
-          <a:bodyPr wrap="none" lIns="0" rIns="0">
-            <a:noAutofit/>
-          </a:bodyPr>
-          <a:lstStyle/>
-          <a:p>
-            <a:pPr algn="l"/>
-            <a:r>
-              <a:rPr sz="3400" b="0" i="0">
-                <a:solidFill>
-                  <a:srgbClr val="D4D4D4"/>
-                </a:solidFill>
-                <a:latin typeface="Arial"/>
-              </a:rPr>
-              <a:t>(</a:t>
-            </a:r>
-          </a:p>
-        </p:txBody>
-      </p:sp>
-      <p:sp>
-        <p:nvSpPr>
-          <p:cNvPr id="17" name="TextBox 16"/>
-          <p:cNvSpPr/>
-          <p:nvPr>
-            <p:ph type="body" idx="16"/>
-          </p:nvPr>
-        </p:nvSpPr>
-        <p:spPr>
-          <a:xfrm>
-            <a:off x="1920850" y="2874262"/>
-            <a:ext cx="4474566" cy="518159"/>
-          </a:xfrm>
-          <a:prstGeom prst="rect">
-            <a:avLst/>
-          </a:prstGeom>
-          <a:noFill/>
-        </p:spPr>
-        <p:txBody>
-          <a:bodyPr wrap="none" lIns="0" rIns="0">
-            <a:noAutofit/>
-          </a:bodyPr>
-          <a:lstStyle/>
-          <a:p>
-            <a:pPr algn="l"/>
-            <a:r>
-              <a:rPr sz="3400" b="0" i="0">
-                <a:solidFill>
-                  <a:srgbClr val="CE9178"/>
-                </a:solidFill>
-                <a:latin typeface="Arial"/>
-              </a:rPr>
-              <a:t>"Hello, world!"</a:t>
-            </a:r>
-          </a:p>
-        </p:txBody>
-      </p:sp>
-      <p:sp>
-        <p:nvSpPr>
-          <p:cNvPr id="18" name="TextBox 17"/>
-          <p:cNvSpPr/>
-          <p:nvPr>
-            <p:ph type="body" idx="17"/>
-          </p:nvPr>
-        </p:nvSpPr>
-        <p:spPr>
-          <a:xfrm>
-            <a:off x="4603155" y="2874262"/>
-            <a:ext cx="412948" cy="518159"/>
-          </a:xfrm>
-          <a:prstGeom prst="rect">
-            <a:avLst/>
-          </a:prstGeom>
-          <a:noFill/>
-        </p:spPr>
-        <p:txBody>
-          <a:bodyPr wrap="none" lIns="0" rIns="0">
-            <a:noAutofit/>
-          </a:bodyPr>
-          <a:lstStyle/>
-          <a:p>
-            <a:pPr algn="l"/>
-            <a:r>
-              <a:rPr sz="3400" b="0" i="0">
-                <a:solidFill>
-                  <a:srgbClr val="D4D4D4"/>
-                </a:solidFill>
-                <a:latin typeface="Arial"/>
-              </a:rPr>
-              <a:t>)</a:t>
-            </a:r>
-          </a:p>
-        </p:txBody>
-      </p:sp>
-      <p:sp>
-        <p:nvSpPr>
-          <p:cNvPr id="19" name="TextBox 18"/>
-          <p:cNvSpPr/>
-          <p:nvPr>
-            <p:ph type="body" idx="18"/>
-          </p:nvPr>
-        </p:nvSpPr>
-        <p:spPr>
-          <a:xfrm>
-            <a:off x="457200" y="3910580"/>
-            <a:ext cx="1680348" cy="518159"/>
-          </a:xfrm>
-          <a:prstGeom prst="rect">
-            <a:avLst/>
-          </a:prstGeom>
-          <a:noFill/>
-        </p:spPr>
-        <p:txBody>
-          <a:bodyPr wrap="none" lIns="0" rIns="0">
-            <a:noAutofit/>
-          </a:bodyPr>
-          <a:lstStyle/>
-          <a:p>
-            <a:pPr algn="l"/>
-            <a:r>
-              <a:rPr sz="3400" b="0" i="0">
-                <a:solidFill>
-                  <a:srgbClr val="DCDCAA"/>
-                </a:solidFill>
-                <a:latin typeface="Arial"/>
-              </a:rPr>
-              <a:t>main</a:t>
-            </a:r>
-          </a:p>
-        </p:txBody>
-      </p:sp>
-      <p:sp>
-        <p:nvSpPr>
-          <p:cNvPr id="20" name="TextBox 19"/>
-          <p:cNvSpPr/>
-          <p:nvPr>
-            <p:ph type="body" idx="19"/>
-          </p:nvPr>
-        </p:nvSpPr>
-        <p:spPr>
-          <a:xfrm>
-            <a:off x="1393118" y="3910580"/>
-            <a:ext cx="643017" cy="518159"/>
-          </a:xfrm>
-          <a:prstGeom prst="rect">
-            <a:avLst/>
-          </a:prstGeom>
-          <a:noFill/>
-        </p:spPr>
-        <p:txBody>
-          <a:bodyPr wrap="none" lIns="0" rIns="0">
-            <a:noAutofit/>
-          </a:bodyPr>
-          <a:lstStyle/>
-          <a:p>
-            <a:pPr algn="l"/>
-            <a:r>
-              <a:rPr sz="3400" b="0" i="0">
-                <a:solidFill>
-                  <a:srgbClr val="D4D4D4"/>
-                </a:solidFill>
-                <a:latin typeface="Arial"/>
-              </a:rPr>
-              <a:t>()</a:t>
-            </a:r>
-          </a:p>
-        </p:txBody>
-      </p:sp>
-      <p:sp>
-        <p:nvSpPr>
-          <p:cNvPr id="21" name="TextBox 20"/>
-          <p:cNvSpPr/>
-          <p:nvPr>
-            <p:ph type="body" idx="20"/>
           </p:nvPr>
         </p:nvSpPr>
         <p:spPr>
@@ -7042,7 +6313,7 @@
             <a:r>
               <a:rPr sz="3400" b="0" i="0">
                 <a:solidFill>
-                  <a:srgbClr val="4EC9B0"/>
+                  <a:srgbClr val="569CD6"/>
                 </a:solidFill>
                 <a:latin typeface="Arial"/>
               </a:rPr>
@@ -7053,10 +6324,10 @@
       </p:sp>
       <p:sp>
         <p:nvSpPr>
-          <p:cNvPr id="22" name="TextBox 21"/>
-          <p:cNvSpPr/>
-          <p:nvPr>
-            <p:ph type="body" idx="21"/>
+          <p:cNvPr id="15" name="TextBox 14"/>
+          <p:cNvSpPr/>
+          <p:nvPr>
+            <p:ph type="body" idx="14"/>
           </p:nvPr>
         </p:nvSpPr>
         <p:spPr>
@@ -7079,7 +6350,7 @@
             <a:r>
               <a:rPr sz="3400" b="0" i="0">
                 <a:solidFill>
-                  <a:srgbClr val="D4D4D4"/>
+                  <a:srgbClr val="FFFFFF"/>
                 </a:solidFill>
                 <a:latin typeface="Arial"/>
               </a:rPr>
@@ -7090,10 +6361,10 @@
       </p:sp>
       <p:sp>
         <p:nvSpPr>
-          <p:cNvPr id="23" name="TextBox 22"/>
-          <p:cNvSpPr/>
-          <p:nvPr>
-            <p:ph type="body" idx="22"/>
+          <p:cNvPr id="16" name="TextBox 15"/>
+          <p:cNvSpPr/>
+          <p:nvPr>
+            <p:ph type="body" idx="15"/>
           </p:nvPr>
         </p:nvSpPr>
         <p:spPr>
@@ -7116,7 +6387,7 @@
             <a:r>
               <a:rPr sz="3400" b="0" i="0">
                 <a:solidFill>
-                  <a:srgbClr val="D4D4D4"/>
+                  <a:srgbClr val="FFFFFF"/>
                 </a:solidFill>
                 <a:latin typeface="Arial"/>
               </a:rPr>
@@ -7138,7 +6409,7 @@
 </p:sldLayout>
 </file>
 
-<file path=ppt/slideLayouts/slideLayout27.xml><?xml version="1.0" encoding="utf-8"?>
+<file path=ppt/slideLayouts/slideLayout26.xml><?xml version="1.0" encoding="utf-8"?>
 <p:sldLayout xmlns:a="http://schemas.openxmlformats.org/drawingml/2006/main" xmlns:r="http://schemas.openxmlformats.org/officeDocument/2006/relationships" xmlns:p="http://schemas.openxmlformats.org/presentationml/2006/main" type="blank" preserve="1">
   <p:cSld name="slidekit · File Tree">
     <p:bg>
@@ -7247,7 +6518,7 @@
             </a:avLst>
           </a:prstGeom>
           <a:solidFill>
-            <a:srgbClr val="0C1A1C"/>
+            <a:srgbClr val="0A2240"/>
           </a:solidFill>
           <a:ln>
             <a:noFill/>
@@ -7290,7 +6561,7 @@
             <a:r>
               <a:rPr sz="2600" b="1" i="0">
                 <a:solidFill>
-                  <a:srgbClr val="569CD6"/>
+                  <a:srgbClr val="0072CE"/>
                 </a:solidFill>
                 <a:latin typeface="Courier New"/>
               </a:rPr>
@@ -7327,7 +6598,7 @@
             <a:r>
               <a:rPr sz="2600" b="0" i="0">
                 <a:solidFill>
-                  <a:srgbClr val="55707A"/>
+                  <a:srgbClr val="0072CE"/>
                 </a:solidFill>
                 <a:latin typeface="Courier New"/>
               </a:rPr>
@@ -7364,7 +6635,7 @@
             <a:r>
               <a:rPr sz="2600" b="1" i="0">
                 <a:solidFill>
-                  <a:srgbClr val="569CD6"/>
+                  <a:srgbClr val="0072CE"/>
                 </a:solidFill>
                 <a:latin typeface="Courier New"/>
               </a:rPr>
@@ -7401,7 +6672,7 @@
             <a:r>
               <a:rPr sz="2600" b="0" i="0">
                 <a:solidFill>
-                  <a:srgbClr val="55707A"/>
+                  <a:srgbClr val="0072CE"/>
                 </a:solidFill>
                 <a:latin typeface="Courier New"/>
               </a:rPr>
@@ -7438,7 +6709,7 @@
             <a:r>
               <a:rPr sz="2600" b="1" i="0">
                 <a:solidFill>
-                  <a:srgbClr val="569CD6"/>
+                  <a:srgbClr val="0072CE"/>
                 </a:solidFill>
                 <a:latin typeface="Courier New"/>
               </a:rPr>
@@ -7475,7 +6746,7 @@
             <a:r>
               <a:rPr sz="2600" b="0" i="0">
                 <a:solidFill>
-                  <a:srgbClr val="55707A"/>
+                  <a:srgbClr val="0072CE"/>
                 </a:solidFill>
                 <a:latin typeface="Courier New"/>
               </a:rPr>
@@ -7512,7 +6783,7 @@
             <a:r>
               <a:rPr sz="2600" b="0" i="0">
                 <a:solidFill>
-                  <a:srgbClr val="D4D4D4"/>
+                  <a:srgbClr val="FFFFFF"/>
                 </a:solidFill>
                 <a:latin typeface="Courier New"/>
               </a:rPr>
@@ -7549,7 +6820,7 @@
             <a:r>
               <a:rPr sz="2600" b="0" i="0">
                 <a:solidFill>
-                  <a:srgbClr val="55707A"/>
+                  <a:srgbClr val="0072CE"/>
                 </a:solidFill>
                 <a:latin typeface="Courier New"/>
               </a:rPr>
@@ -7586,7 +6857,7 @@
             <a:r>
               <a:rPr sz="2600" b="0" i="0">
                 <a:solidFill>
-                  <a:srgbClr val="D4D4D4"/>
+                  <a:srgbClr val="FFFFFF"/>
                 </a:solidFill>
                 <a:latin typeface="Courier New"/>
               </a:rPr>
@@ -7623,7 +6894,7 @@
             <a:r>
               <a:rPr sz="2600" b="0" i="0">
                 <a:solidFill>
-                  <a:srgbClr val="55707A"/>
+                  <a:srgbClr val="0072CE"/>
                 </a:solidFill>
                 <a:latin typeface="Courier New"/>
               </a:rPr>
@@ -7660,7 +6931,7 @@
             <a:r>
               <a:rPr sz="2600" b="0" i="0">
                 <a:solidFill>
-                  <a:srgbClr val="D4D4D4"/>
+                  <a:srgbClr val="FFFFFF"/>
                 </a:solidFill>
                 <a:latin typeface="Courier New"/>
               </a:rPr>
@@ -7697,7 +6968,7 @@
             <a:r>
               <a:rPr sz="2600" b="0" i="0">
                 <a:solidFill>
-                  <a:srgbClr val="55707A"/>
+                  <a:srgbClr val="0072CE"/>
                 </a:solidFill>
                 <a:latin typeface="Courier New"/>
               </a:rPr>
@@ -7734,7 +7005,7 @@
             <a:r>
               <a:rPr sz="2600" b="0" i="0">
                 <a:solidFill>
-                  <a:srgbClr val="D4D4D4"/>
+                  <a:srgbClr val="FFFFFF"/>
                 </a:solidFill>
                 <a:latin typeface="Courier New"/>
               </a:rPr>
@@ -7771,7 +7042,7 @@
             <a:r>
               <a:rPr sz="2600" b="0" i="0">
                 <a:solidFill>
-                  <a:srgbClr val="55707A"/>
+                  <a:srgbClr val="0072CE"/>
                 </a:solidFill>
                 <a:latin typeface="Courier New"/>
               </a:rPr>
@@ -7808,7 +7079,7 @@
             <a:r>
               <a:rPr sz="2600" b="0" i="0">
                 <a:solidFill>
-                  <a:srgbClr val="D4D4D4"/>
+                  <a:srgbClr val="FFFFFF"/>
                 </a:solidFill>
                 <a:latin typeface="Courier New"/>
               </a:rPr>
@@ -7830,7 +7101,7 @@
 </p:sldLayout>
 </file>
 
-<file path=ppt/slideLayouts/slideLayout28.xml><?xml version="1.0" encoding="utf-8"?>
+<file path=ppt/slideLayouts/slideLayout27.xml><?xml version="1.0" encoding="utf-8"?>
 <p:sldLayout xmlns:a="http://schemas.openxmlformats.org/drawingml/2006/main" xmlns:r="http://schemas.openxmlformats.org/officeDocument/2006/relationships" xmlns:p="http://schemas.openxmlformats.org/presentationml/2006/main" type="blank" preserve="1">
   <p:cSld name="slidekit · Numbered Steps">
     <p:bg>
@@ -8266,7 +7537,7 @@
 </p:sldLayout>
 </file>
 
-<file path=ppt/slideLayouts/slideLayout29.xml><?xml version="1.0" encoding="utf-8"?>
+<file path=ppt/slideLayouts/slideLayout28.xml><?xml version="1.0" encoding="utf-8"?>
 <p:sldLayout xmlns:a="http://schemas.openxmlformats.org/drawingml/2006/main" xmlns:r="http://schemas.openxmlformats.org/officeDocument/2006/relationships" xmlns:p="http://schemas.openxmlformats.org/presentationml/2006/main" type="blank" preserve="1">
   <p:cSld name="slidekit · Two Panel List">
     <p:bg>
@@ -8403,8 +7674,8 @@
         </p:nvSpPr>
         <p:spPr>
           <a:xfrm>
-            <a:off x="548640" y="2176271"/>
-            <a:ext cx="1650492" cy="54864"/>
+            <a:off x="457200" y="2176271"/>
+            <a:ext cx="1367718" cy="54864"/>
           </a:xfrm>
           <a:prstGeom prst="rect">
             <a:avLst/>
@@ -8453,7 +7724,7 @@
             <a:r>
               <a:rPr sz="3400" b="1" i="0">
                 <a:solidFill>
-                  <a:srgbClr val="5B6B82"/>
+                  <a:srgbClr val="0A2240"/>
                 </a:solidFill>
                 <a:latin typeface="Arial"/>
               </a:rPr>
@@ -8472,14 +7743,14 @@
         </p:nvSpPr>
         <p:spPr>
           <a:xfrm>
-            <a:off x="6324600" y="2176271"/>
-            <a:ext cx="1650492" cy="54864"/>
+            <a:off x="6233160" y="2176271"/>
+            <a:ext cx="1007604" cy="54864"/>
           </a:xfrm>
           <a:prstGeom prst="rect">
             <a:avLst/>
           </a:prstGeom>
           <a:solidFill>
-            <a:srgbClr val="5B6B82"/>
+            <a:srgbClr val="0A2240"/>
           </a:solidFill>
           <a:ln>
             <a:noFill/>
@@ -8712,6 +7983,294 @@
                 <a:latin typeface="Arial"/>
               </a:rPr>
               <a:t>In-product live chat</a:t>
+            </a:r>
+          </a:p>
+        </p:txBody>
+      </p:sp>
+    </p:spTree>
+    <p:extLst>
+      <p:ext uri="{BB962C8B-B14F-4D97-AF65-F5344CB8AC3E}">
+        <p14:creationId xmlns:p14="http://schemas.microsoft.com/office/powerpoint/2010/main" val="1212999818"/>
+      </p:ext>
+    </p:extLst>
+  </p:cSld>
+  <p:clrMapOvr>
+    <a:masterClrMapping/>
+  </p:clrMapOvr>
+</p:sldLayout>
+</file>
+
+<file path=ppt/slideLayouts/slideLayout29.xml><?xml version="1.0" encoding="utf-8"?>
+<p:sldLayout xmlns:a="http://schemas.openxmlformats.org/drawingml/2006/main" xmlns:r="http://schemas.openxmlformats.org/officeDocument/2006/relationships" xmlns:p="http://schemas.openxmlformats.org/presentationml/2006/main" type="blank" preserve="1">
+  <p:cSld name="slidekit · This vs That">
+    <p:bg>
+      <p:bgPr>
+        <a:solidFill>
+          <a:srgbClr val="FFFFFF"/>
+        </a:solidFill>
+        <a:effectLst/>
+      </p:bgPr>
+    </p:bg>
+    <p:spTree>
+      <p:nvGrpSpPr>
+        <p:cNvPr id="1" name=""/>
+        <p:cNvGrpSpPr/>
+        <p:nvPr/>
+      </p:nvGrpSpPr>
+      <p:grpSpPr>
+        <a:xfrm>
+          <a:off x="0" y="0"/>
+          <a:ext cx="0" cy="0"/>
+          <a:chOff x="0" y="0"/>
+          <a:chExt cx="0" cy="0"/>
+        </a:xfrm>
+      </p:grpSpPr>
+      <p:sp>
+        <p:nvSpPr>
+          <p:cNvPr id="4" name="Slide Number Placeholder 3"/>
+          <p:cNvSpPr>
+            <a:spLocks noGrp="1"/>
+          </p:cNvSpPr>
+          <p:nvPr>
+            <p:ph type="sldNum" sz="quarter" idx="12"/>
+          </p:nvPr>
+        </p:nvSpPr>
+        <p:spPr>
+          <a:xfrm>
+            <a:off x="11186160" y="6035040"/>
+            <a:ext cx="548640" cy="365760"/>
+          </a:xfrm>
+        </p:spPr>
+        <p:txBody>
+          <a:bodyPr/>
+          <a:lstStyle/>
+          <a:p>
+            <a:fld id="{C1FF6DA9-008F-8B48-92A6-B652298478BF}" type="slidenum">
+              <a:rPr lang="en-US" smtClean="0"/>
+              <a:t>‹#›</a:t>
+            </a:fld>
+            <a:endParaRPr lang="en-US"/>
+          </a:p>
+        </p:txBody>
+      </p:sp>
+      <p:sp>
+        <p:nvSpPr>
+          <p:cNvPr id="5" name="TextBox 4"/>
+          <p:cNvSpPr/>
+          <p:nvPr>
+            <p:ph type="title"/>
+          </p:nvPr>
+        </p:nvSpPr>
+        <p:spPr>
+          <a:xfrm>
+            <a:off x="457200" y="457200"/>
+            <a:ext cx="11277600" cy="768096"/>
+          </a:xfrm>
+          <a:prstGeom prst="rect">
+            <a:avLst/>
+          </a:prstGeom>
+          <a:noFill/>
+        </p:spPr>
+        <p:txBody>
+          <a:bodyPr wrap="none" lIns="0" rIns="0">
+            <a:noAutofit/>
+          </a:bodyPr>
+          <a:lstStyle/>
+          <a:p>
+            <a:pPr algn="l"/>
+            <a:r>
+              <a:rPr sz="4200" b="1" i="0">
+                <a:solidFill>
+                  <a:srgbClr val="0072CE"/>
+                </a:solidFill>
+                <a:latin typeface="Arial"/>
+              </a:rPr>
+              <a:t>Cloud or On-Prem</a:t>
+            </a:r>
+          </a:p>
+        </p:txBody>
+      </p:sp>
+      <p:sp>
+        <p:nvSpPr>
+          <p:cNvPr id="6" name="TextBox 5"/>
+          <p:cNvSpPr/>
+          <p:nvPr>
+            <p:ph type="body" idx="1"/>
+          </p:nvPr>
+        </p:nvSpPr>
+        <p:spPr>
+          <a:xfrm>
+            <a:off x="457200" y="2776728"/>
+            <a:ext cx="4792980" cy="914400"/>
+          </a:xfrm>
+          <a:prstGeom prst="rect">
+            <a:avLst/>
+          </a:prstGeom>
+          <a:noFill/>
+        </p:spPr>
+        <p:txBody>
+          <a:bodyPr wrap="none" lIns="0" rIns="0">
+            <a:noAutofit/>
+          </a:bodyPr>
+          <a:lstStyle/>
+          <a:p>
+            <a:pPr algn="ctr"/>
+            <a:r>
+              <a:rPr sz="6000" b="1" i="0">
+                <a:solidFill>
+                  <a:srgbClr val="0A2240"/>
+                </a:solidFill>
+                <a:latin typeface="Arial"/>
+              </a:rPr>
+              <a:t>3 wks</a:t>
+            </a:r>
+          </a:p>
+        </p:txBody>
+      </p:sp>
+      <p:sp>
+        <p:nvSpPr>
+          <p:cNvPr id="7" name="TextBox 6"/>
+          <p:cNvSpPr/>
+          <p:nvPr>
+            <p:ph type="body" idx="2"/>
+          </p:nvPr>
+        </p:nvSpPr>
+        <p:spPr>
+          <a:xfrm>
+            <a:off x="0" y="3965448"/>
+            <a:ext cx="5707380" cy="518159"/>
+          </a:xfrm>
+          <a:prstGeom prst="rect">
+            <a:avLst/>
+          </a:prstGeom>
+          <a:noFill/>
+        </p:spPr>
+        <p:txBody>
+          <a:bodyPr wrap="none" lIns="0" rIns="0">
+            <a:noAutofit/>
+          </a:bodyPr>
+          <a:lstStyle/>
+          <a:p>
+            <a:pPr algn="ctr"/>
+            <a:r>
+              <a:rPr sz="3400" b="0" i="0">
+                <a:solidFill>
+                  <a:srgbClr val="0A2240"/>
+                </a:solidFill>
+                <a:latin typeface="Arial"/>
+              </a:rPr>
+              <a:t>Cloud time-to-launch</a:t>
+            </a:r>
+          </a:p>
+        </p:txBody>
+      </p:sp>
+      <p:sp>
+        <p:nvSpPr>
+          <p:cNvPr id="8" name="TextBox 7"/>
+          <p:cNvSpPr/>
+          <p:nvPr>
+            <p:ph type="body" idx="3"/>
+          </p:nvPr>
+        </p:nvSpPr>
+        <p:spPr>
+          <a:xfrm>
+            <a:off x="6941820" y="2776728"/>
+            <a:ext cx="4792980" cy="914400"/>
+          </a:xfrm>
+          <a:prstGeom prst="rect">
+            <a:avLst/>
+          </a:prstGeom>
+          <a:noFill/>
+        </p:spPr>
+        <p:txBody>
+          <a:bodyPr wrap="none" lIns="0" rIns="0">
+            <a:noAutofit/>
+          </a:bodyPr>
+          <a:lstStyle/>
+          <a:p>
+            <a:pPr algn="ctr"/>
+            <a:r>
+              <a:rPr sz="6000" b="1" i="0">
+                <a:solidFill>
+                  <a:srgbClr val="0A2240"/>
+                </a:solidFill>
+                <a:latin typeface="Arial"/>
+              </a:rPr>
+              <a:t>6 mo</a:t>
+            </a:r>
+          </a:p>
+        </p:txBody>
+      </p:sp>
+      <p:sp>
+        <p:nvSpPr>
+          <p:cNvPr id="9" name="TextBox 8"/>
+          <p:cNvSpPr/>
+          <p:nvPr>
+            <p:ph type="body" idx="4"/>
+          </p:nvPr>
+        </p:nvSpPr>
+        <p:spPr>
+          <a:xfrm>
+            <a:off x="6484620" y="3965448"/>
+            <a:ext cx="5707380" cy="518159"/>
+          </a:xfrm>
+          <a:prstGeom prst="rect">
+            <a:avLst/>
+          </a:prstGeom>
+          <a:noFill/>
+        </p:spPr>
+        <p:txBody>
+          <a:bodyPr wrap="none" lIns="0" rIns="0">
+            <a:noAutofit/>
+          </a:bodyPr>
+          <a:lstStyle/>
+          <a:p>
+            <a:pPr algn="ctr"/>
+            <a:r>
+              <a:rPr sz="3400" b="0" i="0">
+                <a:solidFill>
+                  <a:srgbClr val="0A2240"/>
+                </a:solidFill>
+                <a:latin typeface="Arial"/>
+              </a:rPr>
+              <a:t>On-prem time-to-launch</a:t>
+            </a:r>
+          </a:p>
+        </p:txBody>
+      </p:sp>
+      <p:sp>
+        <p:nvSpPr>
+          <p:cNvPr id="10" name="TextBox 9"/>
+          <p:cNvSpPr/>
+          <p:nvPr>
+            <p:ph type="body" idx="5"/>
+          </p:nvPr>
+        </p:nvSpPr>
+        <p:spPr>
+          <a:xfrm>
+            <a:off x="5435323" y="3310127"/>
+            <a:ext cx="1321354" cy="640080"/>
+          </a:xfrm>
+          <a:prstGeom prst="rect">
+            <a:avLst/>
+          </a:prstGeom>
+          <a:noFill/>
+        </p:spPr>
+        <p:txBody>
+          <a:bodyPr wrap="none" lIns="0" rIns="0">
+            <a:noAutofit/>
+          </a:bodyPr>
+          <a:lstStyle/>
+          <a:p>
+            <a:pPr algn="ctr"/>
+            <a:r>
+              <a:rPr sz="4200" b="1" i="0">
+                <a:solidFill>
+                  <a:srgbClr val="0A2240"/>
+                </a:solidFill>
+                <a:latin typeface="Arial"/>
+              </a:rPr>
+              <a:t>VS</a:t>
             </a:r>
           </a:p>
         </p:txBody>
@@ -8977,294 +8536,6 @@
 
 <file path=ppt/slideLayouts/slideLayout30.xml><?xml version="1.0" encoding="utf-8"?>
 <p:sldLayout xmlns:a="http://schemas.openxmlformats.org/drawingml/2006/main" xmlns:r="http://schemas.openxmlformats.org/officeDocument/2006/relationships" xmlns:p="http://schemas.openxmlformats.org/presentationml/2006/main" type="blank" preserve="1">
-  <p:cSld name="slidekit · This vs That">
-    <p:bg>
-      <p:bgPr>
-        <a:solidFill>
-          <a:srgbClr val="FFFFFF"/>
-        </a:solidFill>
-        <a:effectLst/>
-      </p:bgPr>
-    </p:bg>
-    <p:spTree>
-      <p:nvGrpSpPr>
-        <p:cNvPr id="1" name=""/>
-        <p:cNvGrpSpPr/>
-        <p:nvPr/>
-      </p:nvGrpSpPr>
-      <p:grpSpPr>
-        <a:xfrm>
-          <a:off x="0" y="0"/>
-          <a:ext cx="0" cy="0"/>
-          <a:chOff x="0" y="0"/>
-          <a:chExt cx="0" cy="0"/>
-        </a:xfrm>
-      </p:grpSpPr>
-      <p:sp>
-        <p:nvSpPr>
-          <p:cNvPr id="4" name="Slide Number Placeholder 3"/>
-          <p:cNvSpPr>
-            <a:spLocks noGrp="1"/>
-          </p:cNvSpPr>
-          <p:nvPr>
-            <p:ph type="sldNum" sz="quarter" idx="12"/>
-          </p:nvPr>
-        </p:nvSpPr>
-        <p:spPr>
-          <a:xfrm>
-            <a:off x="11186160" y="6035040"/>
-            <a:ext cx="548640" cy="365760"/>
-          </a:xfrm>
-        </p:spPr>
-        <p:txBody>
-          <a:bodyPr/>
-          <a:lstStyle/>
-          <a:p>
-            <a:fld id="{C1FF6DA9-008F-8B48-92A6-B652298478BF}" type="slidenum">
-              <a:rPr lang="en-US" smtClean="0"/>
-              <a:t>‹#›</a:t>
-            </a:fld>
-            <a:endParaRPr lang="en-US"/>
-          </a:p>
-        </p:txBody>
-      </p:sp>
-      <p:sp>
-        <p:nvSpPr>
-          <p:cNvPr id="5" name="TextBox 4"/>
-          <p:cNvSpPr/>
-          <p:nvPr>
-            <p:ph type="title"/>
-          </p:nvPr>
-        </p:nvSpPr>
-        <p:spPr>
-          <a:xfrm>
-            <a:off x="457200" y="457200"/>
-            <a:ext cx="11277600" cy="768096"/>
-          </a:xfrm>
-          <a:prstGeom prst="rect">
-            <a:avLst/>
-          </a:prstGeom>
-          <a:noFill/>
-        </p:spPr>
-        <p:txBody>
-          <a:bodyPr wrap="none" lIns="0" rIns="0">
-            <a:noAutofit/>
-          </a:bodyPr>
-          <a:lstStyle/>
-          <a:p>
-            <a:pPr algn="l"/>
-            <a:r>
-              <a:rPr sz="4200" b="1" i="0">
-                <a:solidFill>
-                  <a:srgbClr val="0072CE"/>
-                </a:solidFill>
-                <a:latin typeface="Arial"/>
-              </a:rPr>
-              <a:t>Cloud or On-Prem</a:t>
-            </a:r>
-          </a:p>
-        </p:txBody>
-      </p:sp>
-      <p:sp>
-        <p:nvSpPr>
-          <p:cNvPr id="6" name="TextBox 5"/>
-          <p:cNvSpPr/>
-          <p:nvPr>
-            <p:ph type="body" idx="1"/>
-          </p:nvPr>
-        </p:nvSpPr>
-        <p:spPr>
-          <a:xfrm>
-            <a:off x="457200" y="2776728"/>
-            <a:ext cx="4792980" cy="914400"/>
-          </a:xfrm>
-          <a:prstGeom prst="rect">
-            <a:avLst/>
-          </a:prstGeom>
-          <a:noFill/>
-        </p:spPr>
-        <p:txBody>
-          <a:bodyPr wrap="none" lIns="0" rIns="0">
-            <a:noAutofit/>
-          </a:bodyPr>
-          <a:lstStyle/>
-          <a:p>
-            <a:pPr algn="ctr"/>
-            <a:r>
-              <a:rPr sz="6000" b="1" i="0">
-                <a:solidFill>
-                  <a:srgbClr val="0A2240"/>
-                </a:solidFill>
-                <a:latin typeface="Arial"/>
-              </a:rPr>
-              <a:t>3 wks</a:t>
-            </a:r>
-          </a:p>
-        </p:txBody>
-      </p:sp>
-      <p:sp>
-        <p:nvSpPr>
-          <p:cNvPr id="7" name="TextBox 6"/>
-          <p:cNvSpPr/>
-          <p:nvPr>
-            <p:ph type="body" idx="2"/>
-          </p:nvPr>
-        </p:nvSpPr>
-        <p:spPr>
-          <a:xfrm>
-            <a:off x="0" y="3965448"/>
-            <a:ext cx="5707380" cy="518159"/>
-          </a:xfrm>
-          <a:prstGeom prst="rect">
-            <a:avLst/>
-          </a:prstGeom>
-          <a:noFill/>
-        </p:spPr>
-        <p:txBody>
-          <a:bodyPr wrap="none" lIns="0" rIns="0">
-            <a:noAutofit/>
-          </a:bodyPr>
-          <a:lstStyle/>
-          <a:p>
-            <a:pPr algn="ctr"/>
-            <a:r>
-              <a:rPr sz="3400" b="0" i="0">
-                <a:solidFill>
-                  <a:srgbClr val="0A2240"/>
-                </a:solidFill>
-                <a:latin typeface="Arial"/>
-              </a:rPr>
-              <a:t>Cloud time-to-launch</a:t>
-            </a:r>
-          </a:p>
-        </p:txBody>
-      </p:sp>
-      <p:sp>
-        <p:nvSpPr>
-          <p:cNvPr id="8" name="TextBox 7"/>
-          <p:cNvSpPr/>
-          <p:nvPr>
-            <p:ph type="body" idx="3"/>
-          </p:nvPr>
-        </p:nvSpPr>
-        <p:spPr>
-          <a:xfrm>
-            <a:off x="6941820" y="2776728"/>
-            <a:ext cx="4792980" cy="914400"/>
-          </a:xfrm>
-          <a:prstGeom prst="rect">
-            <a:avLst/>
-          </a:prstGeom>
-          <a:noFill/>
-        </p:spPr>
-        <p:txBody>
-          <a:bodyPr wrap="none" lIns="0" rIns="0">
-            <a:noAutofit/>
-          </a:bodyPr>
-          <a:lstStyle/>
-          <a:p>
-            <a:pPr algn="ctr"/>
-            <a:r>
-              <a:rPr sz="6000" b="1" i="0">
-                <a:solidFill>
-                  <a:srgbClr val="0A2240"/>
-                </a:solidFill>
-                <a:latin typeface="Arial"/>
-              </a:rPr>
-              <a:t>6 mo</a:t>
-            </a:r>
-          </a:p>
-        </p:txBody>
-      </p:sp>
-      <p:sp>
-        <p:nvSpPr>
-          <p:cNvPr id="9" name="TextBox 8"/>
-          <p:cNvSpPr/>
-          <p:nvPr>
-            <p:ph type="body" idx="4"/>
-          </p:nvPr>
-        </p:nvSpPr>
-        <p:spPr>
-          <a:xfrm>
-            <a:off x="6484620" y="3965448"/>
-            <a:ext cx="5707380" cy="518159"/>
-          </a:xfrm>
-          <a:prstGeom prst="rect">
-            <a:avLst/>
-          </a:prstGeom>
-          <a:noFill/>
-        </p:spPr>
-        <p:txBody>
-          <a:bodyPr wrap="none" lIns="0" rIns="0">
-            <a:noAutofit/>
-          </a:bodyPr>
-          <a:lstStyle/>
-          <a:p>
-            <a:pPr algn="ctr"/>
-            <a:r>
-              <a:rPr sz="3400" b="0" i="0">
-                <a:solidFill>
-                  <a:srgbClr val="0A2240"/>
-                </a:solidFill>
-                <a:latin typeface="Arial"/>
-              </a:rPr>
-              <a:t>On-prem time-to-launch</a:t>
-            </a:r>
-          </a:p>
-        </p:txBody>
-      </p:sp>
-      <p:sp>
-        <p:nvSpPr>
-          <p:cNvPr id="10" name="TextBox 9"/>
-          <p:cNvSpPr/>
-          <p:nvPr>
-            <p:ph type="body" idx="5"/>
-          </p:nvPr>
-        </p:nvSpPr>
-        <p:spPr>
-          <a:xfrm>
-            <a:off x="5435323" y="3310127"/>
-            <a:ext cx="1321354" cy="640080"/>
-          </a:xfrm>
-          <a:prstGeom prst="rect">
-            <a:avLst/>
-          </a:prstGeom>
-          <a:noFill/>
-        </p:spPr>
-        <p:txBody>
-          <a:bodyPr wrap="none" lIns="0" rIns="0">
-            <a:noAutofit/>
-          </a:bodyPr>
-          <a:lstStyle/>
-          <a:p>
-            <a:pPr algn="ctr"/>
-            <a:r>
-              <a:rPr sz="4200" b="1" i="0">
-                <a:solidFill>
-                  <a:srgbClr val="5B6B82"/>
-                </a:solidFill>
-                <a:latin typeface="Arial"/>
-              </a:rPr>
-              <a:t>VS</a:t>
-            </a:r>
-          </a:p>
-        </p:txBody>
-      </p:sp>
-    </p:spTree>
-    <p:extLst>
-      <p:ext uri="{BB962C8B-B14F-4D97-AF65-F5344CB8AC3E}">
-        <p14:creationId xmlns:p14="http://schemas.microsoft.com/office/powerpoint/2010/main" val="1212999818"/>
-      </p:ext>
-    </p:extLst>
-  </p:cSld>
-  <p:clrMapOvr>
-    <a:masterClrMapping/>
-  </p:clrMapOvr>
-</p:sldLayout>
-</file>
-
-<file path=ppt/slideLayouts/slideLayout31.xml><?xml version="1.0" encoding="utf-8"?>
-<p:sldLayout xmlns:a="http://schemas.openxmlformats.org/drawingml/2006/main" xmlns:r="http://schemas.openxmlformats.org/officeDocument/2006/relationships" xmlns:p="http://schemas.openxmlformats.org/presentationml/2006/main" type="blank" preserve="1">
   <p:cSld name="slidekit · KPI Grid">
     <p:bg>
       <p:bgPr>
@@ -9787,7 +9058,7 @@
         </p:nvSpPr>
         <p:spPr>
           <a:xfrm>
-            <a:off x="4307840" y="3797808"/>
+            <a:off x="4307840" y="4056888"/>
             <a:ext cx="3576320" cy="640080"/>
           </a:xfrm>
           <a:prstGeom prst="rect">
@@ -9824,7 +9095,7 @@
         </p:nvSpPr>
         <p:spPr>
           <a:xfrm>
-            <a:off x="5559552" y="4492752"/>
+            <a:off x="5559552" y="4751832"/>
             <a:ext cx="1072896" cy="54864"/>
           </a:xfrm>
           <a:prstGeom prst="rect">
@@ -9856,16 +9127,16 @@
         </p:nvSpPr>
         <p:spPr>
           <a:xfrm>
-            <a:off x="4307840" y="4602480"/>
-            <a:ext cx="3576320" cy="1127760"/>
-          </a:xfrm>
-          <a:prstGeom prst="rect">
-            <a:avLst/>
-          </a:prstGeom>
-          <a:noFill/>
-        </p:spPr>
-        <p:txBody>
-          <a:bodyPr wrap="square" lIns="0" rIns="0">
+            <a:off x="3943896" y="4861560"/>
+            <a:ext cx="4304208" cy="609600"/>
+          </a:xfrm>
+          <a:prstGeom prst="rect">
+            <a:avLst/>
+          </a:prstGeom>
+          <a:noFill/>
+        </p:spPr>
+        <p:txBody>
+          <a:bodyPr wrap="none" lIns="0" rIns="0">
             <a:noAutofit/>
           </a:bodyPr>
           <a:lstStyle/>
@@ -9878,7 +9149,7 @@
                 </a:solidFill>
                 <a:latin typeface="Arial"/>
               </a:rPr>
-              <a:t>Avg. time to value</a:t>
+              <a:t>Time to value</a:t>
             </a:r>
           </a:p>
         </p:txBody>
@@ -10002,7 +9273,7 @@
 </p:sldLayout>
 </file>
 
-<file path=ppt/slideLayouts/slideLayout32.xml><?xml version="1.0" encoding="utf-8"?>
+<file path=ppt/slideLayouts/slideLayout31.xml><?xml version="1.0" encoding="utf-8"?>
 <p:sldLayout xmlns:a="http://schemas.openxmlformats.org/drawingml/2006/main" xmlns:r="http://schemas.openxmlformats.org/officeDocument/2006/relationships" xmlns:p="http://schemas.openxmlformats.org/presentationml/2006/main" type="blank" preserve="1">
   <p:cSld name="slidekit · Chart With Insight">
     <p:bg>
@@ -10189,7 +9460,7 @@
             <a:r>
               <a:rPr sz="2500" b="0" i="0">
                 <a:solidFill>
-                  <a:srgbClr val="5B6B82"/>
+                  <a:srgbClr val="0A2240"/>
                 </a:solidFill>
                 <a:latin typeface="Arial"/>
               </a:rPr>
@@ -10295,7 +9566,7 @@
             <a:r>
               <a:rPr sz="2500" b="0" i="0">
                 <a:solidFill>
-                  <a:srgbClr val="5B6B82"/>
+                  <a:srgbClr val="0A2240"/>
                 </a:solidFill>
                 <a:latin typeface="Arial"/>
               </a:rPr>
@@ -10401,7 +9672,7 @@
             <a:r>
               <a:rPr sz="2500" b="0" i="0">
                 <a:solidFill>
-                  <a:srgbClr val="5B6B82"/>
+                  <a:srgbClr val="0A2240"/>
                 </a:solidFill>
                 <a:latin typeface="Arial"/>
               </a:rPr>
@@ -10507,7 +9778,7 @@
             <a:r>
               <a:rPr sz="2500" b="0" i="0">
                 <a:solidFill>
-                  <a:srgbClr val="5B6B82"/>
+                  <a:srgbClr val="0A2240"/>
                 </a:solidFill>
                 <a:latin typeface="Arial"/>
               </a:rPr>
@@ -10526,8 +9797,8 @@
         </p:nvSpPr>
         <p:spPr>
           <a:xfrm>
-            <a:off x="7498080" y="1770888"/>
-            <a:ext cx="128016" cy="3718560"/>
+            <a:off x="7498080" y="3325368"/>
+            <a:ext cx="128016" cy="609600"/>
           </a:xfrm>
           <a:prstGeom prst="rect">
             <a:avLst/>
@@ -10558,16 +9829,16 @@
         </p:nvSpPr>
         <p:spPr>
           <a:xfrm>
-            <a:off x="8037576" y="1770888"/>
-            <a:ext cx="3697224" cy="3718560"/>
-          </a:xfrm>
-          <a:prstGeom prst="rect">
-            <a:avLst/>
-          </a:prstGeom>
-          <a:noFill/>
-        </p:spPr>
-        <p:txBody>
-          <a:bodyPr wrap="square" lIns="0" rIns="0">
+            <a:off x="8037576" y="3325368"/>
+            <a:ext cx="4154424" cy="609600"/>
+          </a:xfrm>
+          <a:prstGeom prst="rect">
+            <a:avLst/>
+          </a:prstGeom>
+          <a:noFill/>
+        </p:spPr>
+        <p:txBody>
+          <a:bodyPr wrap="none" lIns="0" rIns="0">
             <a:noAutofit/>
           </a:bodyPr>
           <a:lstStyle/>
@@ -10580,7 +9851,7 @@
                 </a:solidFill>
                 <a:latin typeface="Arial"/>
               </a:rPr>
-              <a:t>Activations nearly quadrupled once self-serve onboarding shipped in February.</a:t>
+              <a:t>Activations 4x.</a:t>
             </a:r>
           </a:p>
         </p:txBody>
@@ -10598,7 +9869,7 @@
 </p:sldLayout>
 </file>
 
-<file path=ppt/slideLayouts/slideLayout33.xml><?xml version="1.0" encoding="utf-8"?>
+<file path=ppt/slideLayouts/slideLayout32.xml><?xml version="1.0" encoding="utf-8"?>
 <p:sldLayout xmlns:a="http://schemas.openxmlformats.org/drawingml/2006/main" xmlns:r="http://schemas.openxmlformats.org/officeDocument/2006/relationships" xmlns:p="http://schemas.openxmlformats.org/presentationml/2006/main" type="blank" preserve="1">
   <p:cSld name="slidekit · Table">
     <p:bg>
@@ -11288,7 +10559,7 @@
 </p:sldLayout>
 </file>
 
-<file path=ppt/slideLayouts/slideLayout34.xml><?xml version="1.0" encoding="utf-8"?>
+<file path=ppt/slideLayouts/slideLayout33.xml><?xml version="1.0" encoding="utf-8"?>
 <p:sldLayout xmlns:a="http://schemas.openxmlformats.org/drawingml/2006/main" xmlns:r="http://schemas.openxmlformats.org/officeDocument/2006/relationships" xmlns:p="http://schemas.openxmlformats.org/presentationml/2006/main" type="blank" preserve="1">
   <p:cSld name="slidekit · Metric Comparison">
     <p:bg>
@@ -11388,7 +10659,7 @@
         </p:nvSpPr>
         <p:spPr>
           <a:xfrm>
-            <a:off x="457200" y="2075688"/>
+            <a:off x="457200" y="2334768"/>
             <a:ext cx="3576320" cy="914400"/>
           </a:xfrm>
           <a:prstGeom prst="rect">
@@ -11425,16 +10696,16 @@
         </p:nvSpPr>
         <p:spPr>
           <a:xfrm>
-            <a:off x="457200" y="3264408"/>
-            <a:ext cx="3576320" cy="1127760"/>
-          </a:xfrm>
-          <a:prstGeom prst="rect">
-            <a:avLst/>
-          </a:prstGeom>
-          <a:noFill/>
-        </p:spPr>
-        <p:txBody>
-          <a:bodyPr wrap="square" lIns="0" rIns="0">
+            <a:off x="457200" y="3523488"/>
+            <a:ext cx="3576320" cy="609600"/>
+          </a:xfrm>
+          <a:prstGeom prst="rect">
+            <a:avLst/>
+          </a:prstGeom>
+          <a:noFill/>
+        </p:spPr>
+        <p:txBody>
+          <a:bodyPr wrap="none" lIns="0" rIns="0">
             <a:noAutofit/>
           </a:bodyPr>
           <a:lstStyle/>
@@ -11447,7 +10718,7 @@
                 </a:solidFill>
                 <a:latin typeface="Arial"/>
               </a:rPr>
-              <a:t>Annual recurring revenue</a:t>
+              <a:t>Revenue</a:t>
             </a:r>
           </a:p>
         </p:txBody>
@@ -11462,7 +10733,7 @@
         </p:nvSpPr>
         <p:spPr>
           <a:xfrm>
-            <a:off x="1522569" y="4666488"/>
+            <a:off x="1522569" y="4407408"/>
             <a:ext cx="1445581" cy="518159"/>
           </a:xfrm>
           <a:prstGeom prst="rect">
@@ -11494,7 +10765,7 @@
         </p:nvSpPr>
         <p:spPr>
           <a:xfrm>
-            <a:off x="1260802" y="4666488"/>
+            <a:off x="1260802" y="4407408"/>
             <a:ext cx="1969115" cy="518159"/>
           </a:xfrm>
           <a:prstGeom prst="rect">
@@ -11531,7 +10802,7 @@
         </p:nvSpPr>
         <p:spPr>
           <a:xfrm>
-            <a:off x="4307840" y="2075688"/>
+            <a:off x="4307840" y="2334768"/>
             <a:ext cx="3576320" cy="914400"/>
           </a:xfrm>
           <a:prstGeom prst="rect">
@@ -11568,8 +10839,8 @@
         </p:nvSpPr>
         <p:spPr>
           <a:xfrm>
-            <a:off x="3834934" y="3264408"/>
-            <a:ext cx="4522132" cy="1127760"/>
+            <a:off x="3834934" y="3523488"/>
+            <a:ext cx="4522132" cy="609600"/>
           </a:xfrm>
           <a:prstGeom prst="rect">
             <a:avLst/>
@@ -11605,7 +10876,7 @@
         </p:nvSpPr>
         <p:spPr>
           <a:xfrm>
-            <a:off x="5175547" y="4666488"/>
+            <a:off x="5175547" y="4407408"/>
             <a:ext cx="1840906" cy="518159"/>
           </a:xfrm>
           <a:prstGeom prst="rect">
@@ -11637,7 +10908,7 @@
         </p:nvSpPr>
         <p:spPr>
           <a:xfrm>
-            <a:off x="4795183" y="4666488"/>
+            <a:off x="4795183" y="4407408"/>
             <a:ext cx="2601634" cy="518159"/>
           </a:xfrm>
           <a:prstGeom prst="rect">
@@ -11674,7 +10945,7 @@
         </p:nvSpPr>
         <p:spPr>
           <a:xfrm>
-            <a:off x="8158480" y="2075688"/>
+            <a:off x="8158480" y="2334768"/>
             <a:ext cx="3576320" cy="914400"/>
           </a:xfrm>
           <a:prstGeom prst="rect">
@@ -11711,16 +10982,16 @@
         </p:nvSpPr>
         <p:spPr>
           <a:xfrm>
-            <a:off x="8158480" y="3264408"/>
-            <a:ext cx="3576320" cy="1127760"/>
-          </a:xfrm>
-          <a:prstGeom prst="rect">
-            <a:avLst/>
-          </a:prstGeom>
-          <a:noFill/>
-        </p:spPr>
-        <p:txBody>
-          <a:bodyPr wrap="square" lIns="0" rIns="0">
+            <a:off x="7701280" y="3523488"/>
+            <a:ext cx="4490720" cy="609600"/>
+          </a:xfrm>
+          <a:prstGeom prst="rect">
+            <a:avLst/>
+          </a:prstGeom>
+          <a:noFill/>
+        </p:spPr>
+        <p:txBody>
+          <a:bodyPr wrap="none" lIns="0" rIns="0">
             <a:noAutofit/>
           </a:bodyPr>
           <a:lstStyle/>
@@ -11733,7 +11004,7 @@
                 </a:solidFill>
                 <a:latin typeface="Arial"/>
               </a:rPr>
-              <a:t>Net promoter score</a:t>
+              <a:t>Promoter score</a:t>
             </a:r>
           </a:p>
         </p:txBody>
@@ -11748,7 +11019,7 @@
         </p:nvSpPr>
         <p:spPr>
           <a:xfrm>
-            <a:off x="9427731" y="4666488"/>
+            <a:off x="9427731" y="4407408"/>
             <a:ext cx="1037817" cy="518159"/>
           </a:xfrm>
           <a:prstGeom prst="rect">
@@ -11780,7 +11051,7 @@
         </p:nvSpPr>
         <p:spPr>
           <a:xfrm>
-            <a:off x="9288294" y="4666488"/>
+            <a:off x="9288294" y="4407408"/>
             <a:ext cx="1316691" cy="518159"/>
           </a:xfrm>
           <a:prstGeom prst="rect">
@@ -11820,7 +11091,7 @@
 </p:sldLayout>
 </file>
 
-<file path=ppt/slideLayouts/slideLayout35.xml><?xml version="1.0" encoding="utf-8"?>
+<file path=ppt/slideLayouts/slideLayout34.xml><?xml version="1.0" encoding="utf-8"?>
 <p:sldLayout xmlns:a="http://schemas.openxmlformats.org/drawingml/2006/main" xmlns:r="http://schemas.openxmlformats.org/officeDocument/2006/relationships" xmlns:p="http://schemas.openxmlformats.org/presentationml/2006/main" type="blank" preserve="1">
   <p:cSld name="slidekit · Process Steps">
     <p:bg>
@@ -11958,7 +11229,7 @@
         <p:spPr>
           <a:xfrm>
             <a:off x="457200" y="2194560"/>
-            <a:ext cx="784098" cy="54864"/>
+            <a:ext cx="593303" cy="54864"/>
           </a:xfrm>
           <a:prstGeom prst="rect">
             <a:avLst/>
@@ -12101,7 +11372,7 @@
         <p:spPr>
           <a:xfrm>
             <a:off x="3345180" y="2194560"/>
-            <a:ext cx="784098" cy="54864"/>
+            <a:ext cx="593303" cy="54864"/>
           </a:xfrm>
           <a:prstGeom prst="rect">
             <a:avLst/>
@@ -12244,7 +11515,7 @@
         <p:spPr>
           <a:xfrm>
             <a:off x="6233160" y="2194560"/>
-            <a:ext cx="784098" cy="54864"/>
+            <a:ext cx="593303" cy="54864"/>
           </a:xfrm>
           <a:prstGeom prst="rect">
             <a:avLst/>
@@ -12387,7 +11658,7 @@
         <p:spPr>
           <a:xfrm>
             <a:off x="9121140" y="2194560"/>
-            <a:ext cx="784098" cy="54864"/>
+            <a:ext cx="593303" cy="54864"/>
           </a:xfrm>
           <a:prstGeom prst="rect">
             <a:avLst/>
@@ -12495,7 +11766,7 @@
 </p:sldLayout>
 </file>
 
-<file path=ppt/slideLayouts/slideLayout36.xml><?xml version="1.0" encoding="utf-8"?>
+<file path=ppt/slideLayouts/slideLayout35.xml><?xml version="1.0" encoding="utf-8"?>
 <p:sldLayout xmlns:a="http://schemas.openxmlformats.org/drawingml/2006/main" xmlns:r="http://schemas.openxmlformats.org/officeDocument/2006/relationships" xmlns:p="http://schemas.openxmlformats.org/presentationml/2006/main" type="blank" preserve="1">
   <p:cSld name="slidekit · Roadmap">
     <p:bg>
@@ -13027,7 +12298,7 @@
 </p:sldLayout>
 </file>
 
-<file path=ppt/slideLayouts/slideLayout37.xml><?xml version="1.0" encoding="utf-8"?>
+<file path=ppt/slideLayouts/slideLayout36.xml><?xml version="1.0" encoding="utf-8"?>
 <p:sldLayout xmlns:a="http://schemas.openxmlformats.org/drawingml/2006/main" xmlns:r="http://schemas.openxmlformats.org/officeDocument/2006/relationships" xmlns:p="http://schemas.openxmlformats.org/presentationml/2006/main" type="blank" preserve="1">
   <p:cSld name="slidekit · Funnel">
     <p:bg>
@@ -13406,7 +12677,7 @@
 </p:sldLayout>
 </file>
 
-<file path=ppt/slideLayouts/slideLayout38.xml><?xml version="1.0" encoding="utf-8"?>
+<file path=ppt/slideLayouts/slideLayout37.xml><?xml version="1.0" encoding="utf-8"?>
 <p:sldLayout xmlns:a="http://schemas.openxmlformats.org/drawingml/2006/main" xmlns:r="http://schemas.openxmlformats.org/officeDocument/2006/relationships" xmlns:p="http://schemas.openxmlformats.org/presentationml/2006/main" type="blank" preserve="1">
   <p:cSld name="slidekit · Nested Circles">
     <p:bg>
@@ -13513,7 +12784,7 @@
             <a:avLst/>
           </a:prstGeom>
           <a:solidFill>
-            <a:srgbClr val="5B6B82"/>
+            <a:srgbClr val="0A2240"/>
           </a:solidFill>
           <a:ln>
             <a:noFill/>
@@ -13577,7 +12848,7 @@
             <a:avLst/>
           </a:prstGeom>
           <a:solidFill>
-            <a:srgbClr val="0072CE"/>
+            <a:srgbClr val="0A2240"/>
           </a:solidFill>
           <a:ln>
             <a:noFill/>
@@ -13827,7 +13098,7 @@
 </p:sldLayout>
 </file>
 
-<file path=ppt/slideLayouts/slideLayout39.xml><?xml version="1.0" encoding="utf-8"?>
+<file path=ppt/slideLayouts/slideLayout38.xml><?xml version="1.0" encoding="utf-8"?>
 <p:sldLayout xmlns:a="http://schemas.openxmlformats.org/drawingml/2006/main" xmlns:r="http://schemas.openxmlformats.org/officeDocument/2006/relationships" xmlns:p="http://schemas.openxmlformats.org/presentationml/2006/main" type="blank" preserve="1">
   <p:cSld name="slidekit · Pyramid">
     <p:bg>
@@ -14189,6 +13460,533 @@
                 <a:latin typeface="Arial"/>
               </a:rPr>
               <a:t>Tactics</a:t>
+            </a:r>
+          </a:p>
+        </p:txBody>
+      </p:sp>
+    </p:spTree>
+    <p:extLst>
+      <p:ext uri="{BB962C8B-B14F-4D97-AF65-F5344CB8AC3E}">
+        <p14:creationId xmlns:p14="http://schemas.microsoft.com/office/powerpoint/2010/main" val="1212999818"/>
+      </p:ext>
+    </p:extLst>
+  </p:cSld>
+  <p:clrMapOvr>
+    <a:masterClrMapping/>
+  </p:clrMapOvr>
+</p:sldLayout>
+</file>
+
+<file path=ppt/slideLayouts/slideLayout39.xml><?xml version="1.0" encoding="utf-8"?>
+<p:sldLayout xmlns:a="http://schemas.openxmlformats.org/drawingml/2006/main" xmlns:r="http://schemas.openxmlformats.org/officeDocument/2006/relationships" xmlns:p="http://schemas.openxmlformats.org/presentationml/2006/main" type="blank" preserve="1">
+  <p:cSld name="slidekit · SWOT">
+    <p:bg>
+      <p:bgPr>
+        <a:solidFill>
+          <a:srgbClr val="FFFFFF"/>
+        </a:solidFill>
+        <a:effectLst/>
+      </p:bgPr>
+    </p:bg>
+    <p:spTree>
+      <p:nvGrpSpPr>
+        <p:cNvPr id="1" name=""/>
+        <p:cNvGrpSpPr/>
+        <p:nvPr/>
+      </p:nvGrpSpPr>
+      <p:grpSpPr>
+        <a:xfrm>
+          <a:off x="0" y="0"/>
+          <a:ext cx="0" cy="0"/>
+          <a:chOff x="0" y="0"/>
+          <a:chExt cx="0" cy="0"/>
+        </a:xfrm>
+      </p:grpSpPr>
+      <p:sp>
+        <p:nvSpPr>
+          <p:cNvPr id="4" name="Slide Number Placeholder 3"/>
+          <p:cNvSpPr>
+            <a:spLocks noGrp="1"/>
+          </p:cNvSpPr>
+          <p:nvPr>
+            <p:ph type="sldNum" sz="quarter" idx="12"/>
+          </p:nvPr>
+        </p:nvSpPr>
+        <p:spPr>
+          <a:xfrm>
+            <a:off x="11186160" y="6035040"/>
+            <a:ext cx="548640" cy="365760"/>
+          </a:xfrm>
+        </p:spPr>
+        <p:txBody>
+          <a:bodyPr/>
+          <a:lstStyle/>
+          <a:p>
+            <a:fld id="{C1FF6DA9-008F-8B48-92A6-B652298478BF}" type="slidenum">
+              <a:rPr lang="en-US" smtClean="0"/>
+              <a:t>‹#›</a:t>
+            </a:fld>
+            <a:endParaRPr lang="en-US"/>
+          </a:p>
+        </p:txBody>
+      </p:sp>
+      <p:sp>
+        <p:nvSpPr>
+          <p:cNvPr id="5" name="TextBox 4"/>
+          <p:cNvSpPr/>
+          <p:nvPr>
+            <p:ph type="title"/>
+          </p:nvPr>
+        </p:nvSpPr>
+        <p:spPr>
+          <a:xfrm>
+            <a:off x="457200" y="457200"/>
+            <a:ext cx="11277600" cy="768096"/>
+          </a:xfrm>
+          <a:prstGeom prst="rect">
+            <a:avLst/>
+          </a:prstGeom>
+          <a:noFill/>
+        </p:spPr>
+        <p:txBody>
+          <a:bodyPr wrap="none" lIns="0" rIns="0">
+            <a:noAutofit/>
+          </a:bodyPr>
+          <a:lstStyle/>
+          <a:p>
+            <a:pPr algn="l"/>
+            <a:r>
+              <a:rPr sz="4200" b="1" i="0">
+                <a:solidFill>
+                  <a:srgbClr val="0072CE"/>
+                </a:solidFill>
+                <a:latin typeface="Arial"/>
+              </a:rPr>
+              <a:t>SWOT Analysis</a:t>
+            </a:r>
+          </a:p>
+        </p:txBody>
+      </p:sp>
+      <p:sp>
+        <p:nvSpPr>
+          <p:cNvPr id="6" name="TextBox 5"/>
+          <p:cNvSpPr/>
+          <p:nvPr>
+            <p:ph type="body" idx="1"/>
+          </p:nvPr>
+        </p:nvSpPr>
+        <p:spPr>
+          <a:xfrm>
+            <a:off x="457200" y="1499616"/>
+            <a:ext cx="5501640" cy="621791"/>
+          </a:xfrm>
+          <a:prstGeom prst="rect">
+            <a:avLst/>
+          </a:prstGeom>
+          <a:noFill/>
+        </p:spPr>
+        <p:txBody>
+          <a:bodyPr wrap="none" lIns="0" rIns="0">
+            <a:noAutofit/>
+          </a:bodyPr>
+          <a:lstStyle/>
+          <a:p>
+            <a:pPr algn="l"/>
+            <a:r>
+              <a:rPr sz="3400" b="1" i="0">
+                <a:solidFill>
+                  <a:srgbClr val="0072CE"/>
+                </a:solidFill>
+                <a:latin typeface="Arial"/>
+              </a:rPr>
+              <a:t>Strengths</a:t>
+            </a:r>
+          </a:p>
+        </p:txBody>
+      </p:sp>
+      <p:sp>
+        <p:nvSpPr>
+          <p:cNvPr id="7" name="Rectangle 6"/>
+          <p:cNvSpPr/>
+          <p:nvPr>
+            <p:ph type="body" idx="2"/>
+          </p:nvPr>
+        </p:nvSpPr>
+        <p:spPr>
+          <a:xfrm>
+            <a:off x="457200" y="2176271"/>
+            <a:ext cx="2015207" cy="54864"/>
+          </a:xfrm>
+          <a:prstGeom prst="rect">
+            <a:avLst/>
+          </a:prstGeom>
+          <a:solidFill>
+            <a:srgbClr val="0072CE"/>
+          </a:solidFill>
+          <a:ln>
+            <a:noFill/>
+          </a:ln>
+          <a:effectLst/>
+        </p:spPr>
+        <p:txBody>
+          <a:bodyPr rtlCol="0" anchor="ctr"/>
+          <a:lstStyle/>
+          <a:p>
+            <a:pPr algn="ctr"/>
+          </a:p>
+        </p:txBody>
+      </p:sp>
+      <p:sp>
+        <p:nvSpPr>
+          <p:cNvPr id="8" name="TextBox 7"/>
+          <p:cNvSpPr/>
+          <p:nvPr>
+            <p:ph type="body" idx="3"/>
+          </p:nvPr>
+        </p:nvSpPr>
+        <p:spPr>
+          <a:xfrm>
+            <a:off x="457200" y="2395727"/>
+            <a:ext cx="7863523" cy="609600"/>
+          </a:xfrm>
+          <a:prstGeom prst="rect">
+            <a:avLst/>
+          </a:prstGeom>
+          <a:noFill/>
+        </p:spPr>
+        <p:txBody>
+          <a:bodyPr wrap="none" lIns="0" rIns="0">
+            <a:noAutofit/>
+          </a:bodyPr>
+          <a:lstStyle/>
+          <a:p>
+            <a:pPr algn="l"/>
+            <a:r>
+              <a:rPr sz="3400" b="0" i="0">
+                <a:solidFill>
+                  <a:srgbClr val="0A2240"/>
+                </a:solidFill>
+                <a:latin typeface="Arial"/>
+              </a:rPr>
+              <a:t>Strong brand, loyal users</a:t>
+            </a:r>
+          </a:p>
+        </p:txBody>
+      </p:sp>
+      <p:sp>
+        <p:nvSpPr>
+          <p:cNvPr id="9" name="TextBox 8"/>
+          <p:cNvSpPr/>
+          <p:nvPr>
+            <p:ph type="body" idx="4"/>
+          </p:nvPr>
+        </p:nvSpPr>
+        <p:spPr>
+          <a:xfrm>
+            <a:off x="6233160" y="1499616"/>
+            <a:ext cx="5501640" cy="621791"/>
+          </a:xfrm>
+          <a:prstGeom prst="rect">
+            <a:avLst/>
+          </a:prstGeom>
+          <a:noFill/>
+        </p:spPr>
+        <p:txBody>
+          <a:bodyPr wrap="none" lIns="0" rIns="0">
+            <a:noAutofit/>
+          </a:bodyPr>
+          <a:lstStyle/>
+          <a:p>
+            <a:pPr algn="l"/>
+            <a:r>
+              <a:rPr sz="3400" b="1" i="0">
+                <a:solidFill>
+                  <a:srgbClr val="0A2240"/>
+                </a:solidFill>
+                <a:latin typeface="Arial"/>
+              </a:rPr>
+              <a:t>Weaknesses</a:t>
+            </a:r>
+          </a:p>
+        </p:txBody>
+      </p:sp>
+      <p:sp>
+        <p:nvSpPr>
+          <p:cNvPr id="10" name="Rectangle 9"/>
+          <p:cNvSpPr/>
+          <p:nvPr>
+            <p:ph type="body" idx="5"/>
+          </p:nvPr>
+        </p:nvSpPr>
+        <p:spPr>
+          <a:xfrm>
+            <a:off x="6233160" y="2176271"/>
+            <a:ext cx="2584686" cy="54864"/>
+          </a:xfrm>
+          <a:prstGeom prst="rect">
+            <a:avLst/>
+          </a:prstGeom>
+          <a:solidFill>
+            <a:srgbClr val="0A2240"/>
+          </a:solidFill>
+          <a:ln>
+            <a:noFill/>
+          </a:ln>
+          <a:effectLst/>
+        </p:spPr>
+        <p:txBody>
+          <a:bodyPr rtlCol="0" anchor="ctr"/>
+          <a:lstStyle/>
+          <a:p>
+            <a:pPr algn="ctr"/>
+          </a:p>
+        </p:txBody>
+      </p:sp>
+      <p:sp>
+        <p:nvSpPr>
+          <p:cNvPr id="11" name="TextBox 10"/>
+          <p:cNvSpPr/>
+          <p:nvPr>
+            <p:ph type="body" idx="6"/>
+          </p:nvPr>
+        </p:nvSpPr>
+        <p:spPr>
+          <a:xfrm>
+            <a:off x="6233160" y="2395727"/>
+            <a:ext cx="5958840" cy="609600"/>
+          </a:xfrm>
+          <a:prstGeom prst="rect">
+            <a:avLst/>
+          </a:prstGeom>
+          <a:noFill/>
+        </p:spPr>
+        <p:txBody>
+          <a:bodyPr wrap="none" lIns="0" rIns="0">
+            <a:noAutofit/>
+          </a:bodyPr>
+          <a:lstStyle/>
+          <a:p>
+            <a:pPr algn="l"/>
+            <a:r>
+              <a:rPr sz="3400" b="0" i="0">
+                <a:solidFill>
+                  <a:srgbClr val="0A2240"/>
+                </a:solidFill>
+                <a:latin typeface="Arial"/>
+              </a:rPr>
+              <a:t>Thin margins, small team</a:t>
+            </a:r>
+          </a:p>
+        </p:txBody>
+      </p:sp>
+      <p:sp>
+        <p:nvSpPr>
+          <p:cNvPr id="12" name="TextBox 11"/>
+          <p:cNvSpPr/>
+          <p:nvPr>
+            <p:ph type="body" idx="7"/>
+          </p:nvPr>
+        </p:nvSpPr>
+        <p:spPr>
+          <a:xfrm>
+            <a:off x="457200" y="3767328"/>
+            <a:ext cx="5501640" cy="621791"/>
+          </a:xfrm>
+          <a:prstGeom prst="rect">
+            <a:avLst/>
+          </a:prstGeom>
+          <a:noFill/>
+        </p:spPr>
+        <p:txBody>
+          <a:bodyPr wrap="none" lIns="0" rIns="0">
+            <a:noAutofit/>
+          </a:bodyPr>
+          <a:lstStyle/>
+          <a:p>
+            <a:pPr algn="l"/>
+            <a:r>
+              <a:rPr sz="3400" b="1" i="0">
+                <a:solidFill>
+                  <a:srgbClr val="0072CE"/>
+                </a:solidFill>
+                <a:latin typeface="Arial"/>
+              </a:rPr>
+              <a:t>Opportunities</a:t>
+            </a:r>
+          </a:p>
+        </p:txBody>
+      </p:sp>
+      <p:sp>
+        <p:nvSpPr>
+          <p:cNvPr id="13" name="Rectangle 12"/>
+          <p:cNvSpPr/>
+          <p:nvPr>
+            <p:ph type="body" idx="8"/>
+          </p:nvPr>
+        </p:nvSpPr>
+        <p:spPr>
+          <a:xfrm>
+            <a:off x="457200" y="4443983"/>
+            <a:ext cx="2830525" cy="54864"/>
+          </a:xfrm>
+          <a:prstGeom prst="rect">
+            <a:avLst/>
+          </a:prstGeom>
+          <a:solidFill>
+            <a:srgbClr val="0072CE"/>
+          </a:solidFill>
+          <a:ln>
+            <a:noFill/>
+          </a:ln>
+          <a:effectLst/>
+        </p:spPr>
+        <p:txBody>
+          <a:bodyPr rtlCol="0" anchor="ctr"/>
+          <a:lstStyle/>
+          <a:p>
+            <a:pPr algn="ctr"/>
+          </a:p>
+        </p:txBody>
+      </p:sp>
+      <p:sp>
+        <p:nvSpPr>
+          <p:cNvPr id="14" name="TextBox 13"/>
+          <p:cNvSpPr/>
+          <p:nvPr>
+            <p:ph type="body" idx="9"/>
+          </p:nvPr>
+        </p:nvSpPr>
+        <p:spPr>
+          <a:xfrm>
+            <a:off x="457200" y="4663439"/>
+            <a:ext cx="8015326" cy="609600"/>
+          </a:xfrm>
+          <a:prstGeom prst="rect">
+            <a:avLst/>
+          </a:prstGeom>
+          <a:noFill/>
+        </p:spPr>
+        <p:txBody>
+          <a:bodyPr wrap="none" lIns="0" rIns="0">
+            <a:noAutofit/>
+          </a:bodyPr>
+          <a:lstStyle/>
+          <a:p>
+            <a:pPr algn="l"/>
+            <a:r>
+              <a:rPr sz="3400" b="0" i="0">
+                <a:solidFill>
+                  <a:srgbClr val="0A2240"/>
+                </a:solidFill>
+                <a:latin typeface="Arial"/>
+              </a:rPr>
+              <a:t>New markets via partners</a:t>
+            </a:r>
+          </a:p>
+        </p:txBody>
+      </p:sp>
+      <p:sp>
+        <p:nvSpPr>
+          <p:cNvPr id="15" name="TextBox 14"/>
+          <p:cNvSpPr/>
+          <p:nvPr>
+            <p:ph type="body" idx="13"/>
+          </p:nvPr>
+        </p:nvSpPr>
+        <p:spPr>
+          <a:xfrm>
+            <a:off x="6233160" y="3767328"/>
+            <a:ext cx="5501640" cy="621791"/>
+          </a:xfrm>
+          <a:prstGeom prst="rect">
+            <a:avLst/>
+          </a:prstGeom>
+          <a:noFill/>
+        </p:spPr>
+        <p:txBody>
+          <a:bodyPr wrap="none" lIns="0" rIns="0">
+            <a:noAutofit/>
+          </a:bodyPr>
+          <a:lstStyle/>
+          <a:p>
+            <a:pPr algn="l"/>
+            <a:r>
+              <a:rPr sz="3400" b="1" i="0">
+                <a:solidFill>
+                  <a:srgbClr val="0A2240"/>
+                </a:solidFill>
+                <a:latin typeface="Arial"/>
+              </a:rPr>
+              <a:t>Threats</a:t>
+            </a:r>
+          </a:p>
+        </p:txBody>
+      </p:sp>
+      <p:sp>
+        <p:nvSpPr>
+          <p:cNvPr id="16" name="Rectangle 15"/>
+          <p:cNvSpPr/>
+          <p:nvPr>
+            <p:ph type="body" idx="14"/>
+          </p:nvPr>
+        </p:nvSpPr>
+        <p:spPr>
+          <a:xfrm>
+            <a:off x="6233160" y="4443983"/>
+            <a:ext cx="1559793" cy="54864"/>
+          </a:xfrm>
+          <a:prstGeom prst="rect">
+            <a:avLst/>
+          </a:prstGeom>
+          <a:solidFill>
+            <a:srgbClr val="0A2240"/>
+          </a:solidFill>
+          <a:ln>
+            <a:noFill/>
+          </a:ln>
+          <a:effectLst/>
+        </p:spPr>
+        <p:txBody>
+          <a:bodyPr rtlCol="0" anchor="ctr"/>
+          <a:lstStyle/>
+          <a:p>
+            <a:pPr algn="ctr"/>
+          </a:p>
+        </p:txBody>
+      </p:sp>
+      <p:sp>
+        <p:nvSpPr>
+          <p:cNvPr id="17" name="TextBox 16"/>
+          <p:cNvSpPr/>
+          <p:nvPr>
+            <p:ph type="body" idx="15"/>
+          </p:nvPr>
+        </p:nvSpPr>
+        <p:spPr>
+          <a:xfrm>
+            <a:off x="6233160" y="4663439"/>
+            <a:ext cx="5958840" cy="609600"/>
+          </a:xfrm>
+          <a:prstGeom prst="rect">
+            <a:avLst/>
+          </a:prstGeom>
+          <a:noFill/>
+        </p:spPr>
+        <p:txBody>
+          <a:bodyPr wrap="none" lIns="0" rIns="0">
+            <a:noAutofit/>
+          </a:bodyPr>
+          <a:lstStyle/>
+          <a:p>
+            <a:pPr algn="l"/>
+            <a:r>
+              <a:rPr sz="3400" b="0" i="0">
+                <a:solidFill>
+                  <a:srgbClr val="0A2240"/>
+                </a:solidFill>
+                <a:latin typeface="Arial"/>
+              </a:rPr>
+              <a:t>New entrants cut prices</a:t>
             </a:r>
           </a:p>
         </p:txBody>
@@ -14495,533 +14293,6 @@
 </file>
 
 <file path=ppt/slideLayouts/slideLayout40.xml><?xml version="1.0" encoding="utf-8"?>
-<p:sldLayout xmlns:a="http://schemas.openxmlformats.org/drawingml/2006/main" xmlns:r="http://schemas.openxmlformats.org/officeDocument/2006/relationships" xmlns:p="http://schemas.openxmlformats.org/presentationml/2006/main" type="blank" preserve="1">
-  <p:cSld name="slidekit · SWOT">
-    <p:bg>
-      <p:bgPr>
-        <a:solidFill>
-          <a:srgbClr val="FFFFFF"/>
-        </a:solidFill>
-        <a:effectLst/>
-      </p:bgPr>
-    </p:bg>
-    <p:spTree>
-      <p:nvGrpSpPr>
-        <p:cNvPr id="1" name=""/>
-        <p:cNvGrpSpPr/>
-        <p:nvPr/>
-      </p:nvGrpSpPr>
-      <p:grpSpPr>
-        <a:xfrm>
-          <a:off x="0" y="0"/>
-          <a:ext cx="0" cy="0"/>
-          <a:chOff x="0" y="0"/>
-          <a:chExt cx="0" cy="0"/>
-        </a:xfrm>
-      </p:grpSpPr>
-      <p:sp>
-        <p:nvSpPr>
-          <p:cNvPr id="4" name="Slide Number Placeholder 3"/>
-          <p:cNvSpPr>
-            <a:spLocks noGrp="1"/>
-          </p:cNvSpPr>
-          <p:nvPr>
-            <p:ph type="sldNum" sz="quarter" idx="12"/>
-          </p:nvPr>
-        </p:nvSpPr>
-        <p:spPr>
-          <a:xfrm>
-            <a:off x="11186160" y="6035040"/>
-            <a:ext cx="548640" cy="365760"/>
-          </a:xfrm>
-        </p:spPr>
-        <p:txBody>
-          <a:bodyPr/>
-          <a:lstStyle/>
-          <a:p>
-            <a:fld id="{C1FF6DA9-008F-8B48-92A6-B652298478BF}" type="slidenum">
-              <a:rPr lang="en-US" smtClean="0"/>
-              <a:t>‹#›</a:t>
-            </a:fld>
-            <a:endParaRPr lang="en-US"/>
-          </a:p>
-        </p:txBody>
-      </p:sp>
-      <p:sp>
-        <p:nvSpPr>
-          <p:cNvPr id="5" name="TextBox 4"/>
-          <p:cNvSpPr/>
-          <p:nvPr>
-            <p:ph type="title"/>
-          </p:nvPr>
-        </p:nvSpPr>
-        <p:spPr>
-          <a:xfrm>
-            <a:off x="457200" y="457200"/>
-            <a:ext cx="11277600" cy="768096"/>
-          </a:xfrm>
-          <a:prstGeom prst="rect">
-            <a:avLst/>
-          </a:prstGeom>
-          <a:noFill/>
-        </p:spPr>
-        <p:txBody>
-          <a:bodyPr wrap="none" lIns="0" rIns="0">
-            <a:noAutofit/>
-          </a:bodyPr>
-          <a:lstStyle/>
-          <a:p>
-            <a:pPr algn="l"/>
-            <a:r>
-              <a:rPr sz="4200" b="1" i="0">
-                <a:solidFill>
-                  <a:srgbClr val="0072CE"/>
-                </a:solidFill>
-                <a:latin typeface="Arial"/>
-              </a:rPr>
-              <a:t>SWOT Analysis</a:t>
-            </a:r>
-          </a:p>
-        </p:txBody>
-      </p:sp>
-      <p:sp>
-        <p:nvSpPr>
-          <p:cNvPr id="6" name="TextBox 5"/>
-          <p:cNvSpPr/>
-          <p:nvPr>
-            <p:ph type="body" idx="1"/>
-          </p:nvPr>
-        </p:nvSpPr>
-        <p:spPr>
-          <a:xfrm>
-            <a:off x="457200" y="1499616"/>
-            <a:ext cx="5501640" cy="621791"/>
-          </a:xfrm>
-          <a:prstGeom prst="rect">
-            <a:avLst/>
-          </a:prstGeom>
-          <a:noFill/>
-        </p:spPr>
-        <p:txBody>
-          <a:bodyPr wrap="none" lIns="0" rIns="0">
-            <a:noAutofit/>
-          </a:bodyPr>
-          <a:lstStyle/>
-          <a:p>
-            <a:pPr algn="l"/>
-            <a:r>
-              <a:rPr sz="3400" b="1" i="0">
-                <a:solidFill>
-                  <a:srgbClr val="0072CE"/>
-                </a:solidFill>
-                <a:latin typeface="Arial"/>
-              </a:rPr>
-              <a:t>Strengths</a:t>
-            </a:r>
-          </a:p>
-        </p:txBody>
-      </p:sp>
-      <p:sp>
-        <p:nvSpPr>
-          <p:cNvPr id="7" name="Rectangle 6"/>
-          <p:cNvSpPr/>
-          <p:nvPr>
-            <p:ph type="body" idx="2"/>
-          </p:nvPr>
-        </p:nvSpPr>
-        <p:spPr>
-          <a:xfrm>
-            <a:off x="457200" y="2176271"/>
-            <a:ext cx="1650492" cy="54864"/>
-          </a:xfrm>
-          <a:prstGeom prst="rect">
-            <a:avLst/>
-          </a:prstGeom>
-          <a:solidFill>
-            <a:srgbClr val="0072CE"/>
-          </a:solidFill>
-          <a:ln>
-            <a:noFill/>
-          </a:ln>
-          <a:effectLst/>
-        </p:spPr>
-        <p:txBody>
-          <a:bodyPr rtlCol="0" anchor="ctr"/>
-          <a:lstStyle/>
-          <a:p>
-            <a:pPr algn="ctr"/>
-          </a:p>
-        </p:txBody>
-      </p:sp>
-      <p:sp>
-        <p:nvSpPr>
-          <p:cNvPr id="8" name="TextBox 7"/>
-          <p:cNvSpPr/>
-          <p:nvPr>
-            <p:ph type="body" idx="3"/>
-          </p:nvPr>
-        </p:nvSpPr>
-        <p:spPr>
-          <a:xfrm>
-            <a:off x="457200" y="2395727"/>
-            <a:ext cx="5501640" cy="1097281"/>
-          </a:xfrm>
-          <a:prstGeom prst="rect">
-            <a:avLst/>
-          </a:prstGeom>
-          <a:noFill/>
-        </p:spPr>
-        <p:txBody>
-          <a:bodyPr wrap="square" lIns="0" rIns="0">
-            <a:noAutofit/>
-          </a:bodyPr>
-          <a:lstStyle/>
-          <a:p>
-            <a:pPr algn="l"/>
-            <a:r>
-              <a:rPr sz="3400" b="0" i="0">
-                <a:solidFill>
-                  <a:srgbClr val="0A2240"/>
-                </a:solidFill>
-                <a:latin typeface="Arial"/>
-              </a:rPr>
-              <a:t>A strong brand with loyal users</a:t>
-            </a:r>
-          </a:p>
-        </p:txBody>
-      </p:sp>
-      <p:sp>
-        <p:nvSpPr>
-          <p:cNvPr id="9" name="TextBox 8"/>
-          <p:cNvSpPr/>
-          <p:nvPr>
-            <p:ph type="body" idx="4"/>
-          </p:nvPr>
-        </p:nvSpPr>
-        <p:spPr>
-          <a:xfrm>
-            <a:off x="6233160" y="1499616"/>
-            <a:ext cx="5501640" cy="621791"/>
-          </a:xfrm>
-          <a:prstGeom prst="rect">
-            <a:avLst/>
-          </a:prstGeom>
-          <a:noFill/>
-        </p:spPr>
-        <p:txBody>
-          <a:bodyPr wrap="none" lIns="0" rIns="0">
-            <a:noAutofit/>
-          </a:bodyPr>
-          <a:lstStyle/>
-          <a:p>
-            <a:pPr algn="l"/>
-            <a:r>
-              <a:rPr sz="3400" b="1" i="0">
-                <a:solidFill>
-                  <a:srgbClr val="5B6B82"/>
-                </a:solidFill>
-                <a:latin typeface="Arial"/>
-              </a:rPr>
-              <a:t>Weaknesses</a:t>
-            </a:r>
-          </a:p>
-        </p:txBody>
-      </p:sp>
-      <p:sp>
-        <p:nvSpPr>
-          <p:cNvPr id="10" name="Rectangle 9"/>
-          <p:cNvSpPr/>
-          <p:nvPr>
-            <p:ph type="body" idx="5"/>
-          </p:nvPr>
-        </p:nvSpPr>
-        <p:spPr>
-          <a:xfrm>
-            <a:off x="6233160" y="2176271"/>
-            <a:ext cx="1650492" cy="54864"/>
-          </a:xfrm>
-          <a:prstGeom prst="rect">
-            <a:avLst/>
-          </a:prstGeom>
-          <a:solidFill>
-            <a:srgbClr val="5B6B82"/>
-          </a:solidFill>
-          <a:ln>
-            <a:noFill/>
-          </a:ln>
-          <a:effectLst/>
-        </p:spPr>
-        <p:txBody>
-          <a:bodyPr rtlCol="0" anchor="ctr"/>
-          <a:lstStyle/>
-          <a:p>
-            <a:pPr algn="ctr"/>
-          </a:p>
-        </p:txBody>
-      </p:sp>
-      <p:sp>
-        <p:nvSpPr>
-          <p:cNvPr id="11" name="TextBox 10"/>
-          <p:cNvSpPr/>
-          <p:nvPr>
-            <p:ph type="body" idx="6"/>
-          </p:nvPr>
-        </p:nvSpPr>
-        <p:spPr>
-          <a:xfrm>
-            <a:off x="6233160" y="2395727"/>
-            <a:ext cx="5501640" cy="1097281"/>
-          </a:xfrm>
-          <a:prstGeom prst="rect">
-            <a:avLst/>
-          </a:prstGeom>
-          <a:noFill/>
-        </p:spPr>
-        <p:txBody>
-          <a:bodyPr wrap="square" lIns="0" rIns="0">
-            <a:noAutofit/>
-          </a:bodyPr>
-          <a:lstStyle/>
-          <a:p>
-            <a:pPr algn="l"/>
-            <a:r>
-              <a:rPr sz="3400" b="0" i="0">
-                <a:solidFill>
-                  <a:srgbClr val="0A2240"/>
-                </a:solidFill>
-                <a:latin typeface="Arial"/>
-              </a:rPr>
-              <a:t>Thin margins and a small team</a:t>
-            </a:r>
-          </a:p>
-        </p:txBody>
-      </p:sp>
-      <p:sp>
-        <p:nvSpPr>
-          <p:cNvPr id="12" name="TextBox 11"/>
-          <p:cNvSpPr/>
-          <p:nvPr>
-            <p:ph type="body" idx="7"/>
-          </p:nvPr>
-        </p:nvSpPr>
-        <p:spPr>
-          <a:xfrm>
-            <a:off x="457200" y="3767328"/>
-            <a:ext cx="5501640" cy="621791"/>
-          </a:xfrm>
-          <a:prstGeom prst="rect">
-            <a:avLst/>
-          </a:prstGeom>
-          <a:noFill/>
-        </p:spPr>
-        <p:txBody>
-          <a:bodyPr wrap="none" lIns="0" rIns="0">
-            <a:noAutofit/>
-          </a:bodyPr>
-          <a:lstStyle/>
-          <a:p>
-            <a:pPr algn="l"/>
-            <a:r>
-              <a:rPr sz="3400" b="1" i="0">
-                <a:solidFill>
-                  <a:srgbClr val="0072CE"/>
-                </a:solidFill>
-                <a:latin typeface="Arial"/>
-              </a:rPr>
-              <a:t>Opportunities</a:t>
-            </a:r>
-          </a:p>
-        </p:txBody>
-      </p:sp>
-      <p:sp>
-        <p:nvSpPr>
-          <p:cNvPr id="13" name="Rectangle 12"/>
-          <p:cNvSpPr/>
-          <p:nvPr>
-            <p:ph type="body" idx="8"/>
-          </p:nvPr>
-        </p:nvSpPr>
-        <p:spPr>
-          <a:xfrm>
-            <a:off x="457200" y="4443983"/>
-            <a:ext cx="1650492" cy="54864"/>
-          </a:xfrm>
-          <a:prstGeom prst="rect">
-            <a:avLst/>
-          </a:prstGeom>
-          <a:solidFill>
-            <a:srgbClr val="0072CE"/>
-          </a:solidFill>
-          <a:ln>
-            <a:noFill/>
-          </a:ln>
-          <a:effectLst/>
-        </p:spPr>
-        <p:txBody>
-          <a:bodyPr rtlCol="0" anchor="ctr"/>
-          <a:lstStyle/>
-          <a:p>
-            <a:pPr algn="ctr"/>
-          </a:p>
-        </p:txBody>
-      </p:sp>
-      <p:sp>
-        <p:nvSpPr>
-          <p:cNvPr id="14" name="TextBox 13"/>
-          <p:cNvSpPr/>
-          <p:nvPr>
-            <p:ph type="body" idx="9"/>
-          </p:nvPr>
-        </p:nvSpPr>
-        <p:spPr>
-          <a:xfrm>
-            <a:off x="457200" y="4663439"/>
-            <a:ext cx="5501640" cy="1097281"/>
-          </a:xfrm>
-          <a:prstGeom prst="rect">
-            <a:avLst/>
-          </a:prstGeom>
-          <a:noFill/>
-        </p:spPr>
-        <p:txBody>
-          <a:bodyPr wrap="square" lIns="0" rIns="0">
-            <a:noAutofit/>
-          </a:bodyPr>
-          <a:lstStyle/>
-          <a:p>
-            <a:pPr algn="l"/>
-            <a:r>
-              <a:rPr sz="3400" b="0" i="0">
-                <a:solidFill>
-                  <a:srgbClr val="0A2240"/>
-                </a:solidFill>
-                <a:latin typeface="Arial"/>
-              </a:rPr>
-              <a:t>New markets through partnerships</a:t>
-            </a:r>
-          </a:p>
-        </p:txBody>
-      </p:sp>
-      <p:sp>
-        <p:nvSpPr>
-          <p:cNvPr id="15" name="TextBox 14"/>
-          <p:cNvSpPr/>
-          <p:nvPr>
-            <p:ph type="body" idx="13"/>
-          </p:nvPr>
-        </p:nvSpPr>
-        <p:spPr>
-          <a:xfrm>
-            <a:off x="6233160" y="3767328"/>
-            <a:ext cx="5501640" cy="621791"/>
-          </a:xfrm>
-          <a:prstGeom prst="rect">
-            <a:avLst/>
-          </a:prstGeom>
-          <a:noFill/>
-        </p:spPr>
-        <p:txBody>
-          <a:bodyPr wrap="none" lIns="0" rIns="0">
-            <a:noAutofit/>
-          </a:bodyPr>
-          <a:lstStyle/>
-          <a:p>
-            <a:pPr algn="l"/>
-            <a:r>
-              <a:rPr sz="3400" b="1" i="0">
-                <a:solidFill>
-                  <a:srgbClr val="5B6B82"/>
-                </a:solidFill>
-                <a:latin typeface="Arial"/>
-              </a:rPr>
-              <a:t>Threats</a:t>
-            </a:r>
-          </a:p>
-        </p:txBody>
-      </p:sp>
-      <p:sp>
-        <p:nvSpPr>
-          <p:cNvPr id="16" name="Rectangle 15"/>
-          <p:cNvSpPr/>
-          <p:nvPr>
-            <p:ph type="body" idx="14"/>
-          </p:nvPr>
-        </p:nvSpPr>
-        <p:spPr>
-          <a:xfrm>
-            <a:off x="6233160" y="4443983"/>
-            <a:ext cx="1650492" cy="54864"/>
-          </a:xfrm>
-          <a:prstGeom prst="rect">
-            <a:avLst/>
-          </a:prstGeom>
-          <a:solidFill>
-            <a:srgbClr val="5B6B82"/>
-          </a:solidFill>
-          <a:ln>
-            <a:noFill/>
-          </a:ln>
-          <a:effectLst/>
-        </p:spPr>
-        <p:txBody>
-          <a:bodyPr rtlCol="0" anchor="ctr"/>
-          <a:lstStyle/>
-          <a:p>
-            <a:pPr algn="ctr"/>
-          </a:p>
-        </p:txBody>
-      </p:sp>
-      <p:sp>
-        <p:nvSpPr>
-          <p:cNvPr id="17" name="TextBox 16"/>
-          <p:cNvSpPr/>
-          <p:nvPr>
-            <p:ph type="body" idx="15"/>
-          </p:nvPr>
-        </p:nvSpPr>
-        <p:spPr>
-          <a:xfrm>
-            <a:off x="6233160" y="4663439"/>
-            <a:ext cx="5501640" cy="1097281"/>
-          </a:xfrm>
-          <a:prstGeom prst="rect">
-            <a:avLst/>
-          </a:prstGeom>
-          <a:noFill/>
-        </p:spPr>
-        <p:txBody>
-          <a:bodyPr wrap="square" lIns="0" rIns="0">
-            <a:noAutofit/>
-          </a:bodyPr>
-          <a:lstStyle/>
-          <a:p>
-            <a:pPr algn="l"/>
-            <a:r>
-              <a:rPr sz="3400" b="0" i="0">
-                <a:solidFill>
-                  <a:srgbClr val="0A2240"/>
-                </a:solidFill>
-                <a:latin typeface="Arial"/>
-              </a:rPr>
-              <a:t>New entrants driving price pressure</a:t>
-            </a:r>
-          </a:p>
-        </p:txBody>
-      </p:sp>
-    </p:spTree>
-    <p:extLst>
-      <p:ext uri="{BB962C8B-B14F-4D97-AF65-F5344CB8AC3E}">
-        <p14:creationId xmlns:p14="http://schemas.microsoft.com/office/powerpoint/2010/main" val="1212999818"/>
-      </p:ext>
-    </p:extLst>
-  </p:cSld>
-  <p:clrMapOvr>
-    <a:masterClrMapping/>
-  </p:clrMapOvr>
-</p:sldLayout>
-</file>
-
-<file path=ppt/slideLayouts/slideLayout41.xml><?xml version="1.0" encoding="utf-8"?>
 <p:sldLayout xmlns:a="http://schemas.openxmlformats.org/drawingml/2006/main" xmlns:r="http://schemas.openxmlformats.org/officeDocument/2006/relationships" xmlns:p="http://schemas.openxmlformats.org/presentationml/2006/main" type="blank" preserve="1">
   <p:cSld name="slidekit · Comparison Matrix">
     <p:bg>
@@ -17225,7 +16496,6 @@
     <p:sldLayoutId id="2147483738" r:id="rId39"/>
     <p:sldLayoutId id="2147483739" r:id="rId40"/>
     <p:sldLayoutId id="2147483740" r:id="rId41"/>
-    <p:sldLayoutId id="2147483741" r:id="rId42"/>
   </p:sldLayoutIdLst>
   <p:txStyles>
     <p:titleStyle>
@@ -17972,7 +17242,7 @@
             <a:fld id="{4B0E1F8A-6C1D-4E2A-9F3B-7A5C8D2E1F60}" type="slidenum">
               <a:rPr sz="1600" b="0" i="0">
                 <a:solidFill>
-                  <a:srgbClr val="5B6B82"/>
+                  <a:srgbClr val="0A2240"/>
                 </a:solidFill>
                 <a:latin typeface="Arial"/>
               </a:rPr>
@@ -18149,7 +17419,7 @@
             <a:fld id="{4B0E1F8A-6C1D-4E2A-9F3B-7A5C8D2E1F60}" type="slidenum">
               <a:rPr sz="1600" b="0" i="0">
                 <a:solidFill>
-                  <a:srgbClr val="5B6B82"/>
+                  <a:srgbClr val="0A2240"/>
                 </a:solidFill>
                 <a:latin typeface="Arial"/>
               </a:rPr>
@@ -18376,7 +17646,7 @@
             <a:fld id="{4B0E1F8A-6C1D-4E2A-9F3B-7A5C8D2E1F60}" type="slidenum">
               <a:rPr sz="1600" b="0" i="0">
                 <a:solidFill>
-                  <a:srgbClr val="5B6B82"/>
+                  <a:srgbClr val="0A2240"/>
                 </a:solidFill>
                 <a:latin typeface="Arial"/>
               </a:rPr>
@@ -18639,7 +17909,7 @@
             <a:fld id="{4B0E1F8A-6C1D-4E2A-9F3B-7A5C8D2E1F60}" type="slidenum">
               <a:rPr sz="1600" b="0" i="0">
                 <a:solidFill>
-                  <a:srgbClr val="5B6B82"/>
+                  <a:srgbClr val="0A2240"/>
                 </a:solidFill>
                 <a:latin typeface="Arial"/>
               </a:rPr>
@@ -18913,7 +18183,7 @@
             <a:fld id="{4B0E1F8A-6C1D-4E2A-9F3B-7A5C8D2E1F60}" type="slidenum">
               <a:rPr sz="1600" b="0" i="0">
                 <a:solidFill>
-                  <a:srgbClr val="5B6B82"/>
+                  <a:srgbClr val="0A2240"/>
                 </a:solidFill>
                 <a:latin typeface="Arial"/>
               </a:rPr>
@@ -19140,7 +18410,7 @@
             <a:fld id="{4B0E1F8A-6C1D-4E2A-9F3B-7A5C8D2E1F60}" type="slidenum">
               <a:rPr sz="1600" b="0" i="0">
                 <a:solidFill>
-                  <a:srgbClr val="5B6B82"/>
+                  <a:srgbClr val="0A2240"/>
                 </a:solidFill>
                 <a:latin typeface="Arial"/>
               </a:rPr>
@@ -19414,7 +18684,7 @@
             <a:fld id="{4B0E1F8A-6C1D-4E2A-9F3B-7A5C8D2E1F60}" type="slidenum">
               <a:rPr sz="1600" b="0" i="0">
                 <a:solidFill>
-                  <a:srgbClr val="5B6B82"/>
+                  <a:srgbClr val="0A2240"/>
                 </a:solidFill>
                 <a:latin typeface="Arial"/>
               </a:rPr>
@@ -19458,7 +18728,7 @@
         <p:spPr>
           <a:xfrm>
             <a:off x="457200" y="457200"/>
-            <a:ext cx="11277600" cy="768096"/>
+            <a:ext cx="11734800" cy="768096"/>
           </a:xfrm>
           <a:prstGeom prst="rect">
             <a:avLst/>
@@ -19479,7 +18749,7 @@
                 </a:solidFill>
                 <a:latin typeface="Arial"/>
               </a:rPr>
-              <a:t>Your First Ten Minutes</a:t>
+              <a:t>Screenshots, Captured 21 Oct 2026</a:t>
             </a:r>
           </a:p>
         </p:txBody>
@@ -19493,28 +18763,28 @@
         <p:spPr>
           <a:xfrm>
             <a:off x="457200" y="1499616"/>
-            <a:ext cx="1132164" cy="640080"/>
-          </a:xfrm>
-          <a:prstGeom prst="rect">
-            <a:avLst/>
-          </a:prstGeom>
-          <a:noFill/>
-        </p:spPr>
-        <p:txBody>
-          <a:bodyPr wrap="none" lIns="0" rIns="0">
-            <a:noAutofit/>
-          </a:bodyPr>
-          <a:lstStyle/>
-          <a:p>
-            <a:pPr algn="l"/>
-            <a:r>
-              <a:rPr sz="4200" b="1" i="0">
+            <a:ext cx="3945612" cy="518159"/>
+          </a:xfrm>
+          <a:prstGeom prst="rect">
+            <a:avLst/>
+          </a:prstGeom>
+          <a:noFill/>
+        </p:spPr>
+        <p:txBody>
+          <a:bodyPr wrap="none" lIns="0" rIns="0">
+            <a:noAutofit/>
+          </a:bodyPr>
+          <a:lstStyle/>
+          <a:p>
+            <a:pPr algn="l"/>
+            <a:r>
+              <a:rPr sz="3400" b="1" i="0">
                 <a:solidFill>
                   <a:srgbClr val="0072CE"/>
                 </a:solidFill>
                 <a:latin typeface="Arial"/>
               </a:rPr>
-              <a:t>01</a:t>
+              <a:t>Screenshot</a:t>
             </a:r>
           </a:p>
         </p:txBody>
@@ -19527,65 +18797,74 @@
         </p:nvSpPr>
         <p:spPr>
           <a:xfrm>
-            <a:off x="1461983" y="1499616"/>
-            <a:ext cx="10272817" cy="640080"/>
-          </a:xfrm>
-          <a:prstGeom prst="rect">
-            <a:avLst/>
-          </a:prstGeom>
-          <a:noFill/>
-        </p:spPr>
-        <p:txBody>
-          <a:bodyPr wrap="none" lIns="0" rIns="0">
-            <a:noAutofit/>
-          </a:bodyPr>
-          <a:lstStyle/>
-          <a:p>
-            <a:pPr algn="l"/>
-            <a:r>
-              <a:rPr sz="4200" b="1" i="0">
+            <a:off x="4250618" y="1499616"/>
+            <a:ext cx="4948786" cy="518159"/>
+          </a:xfrm>
+          <a:prstGeom prst="rect">
+            <a:avLst/>
+          </a:prstGeom>
+          <a:noFill/>
+        </p:spPr>
+        <p:txBody>
+          <a:bodyPr wrap="none" lIns="0" rIns="0">
+            <a:noAutofit/>
+          </a:bodyPr>
+          <a:lstStyle/>
+          <a:p>
+            <a:pPr algn="l"/>
+            <a:r>
+              <a:rPr sz="3400" b="1" i="0">
                 <a:solidFill>
                   <a:srgbClr val="0072CE"/>
                 </a:solidFill>
                 <a:latin typeface="Arial"/>
               </a:rPr>
-              <a:t>Make an account</a:t>
-            </a:r>
-          </a:p>
-        </p:txBody>
-      </p:sp>
-      <p:sp>
-        <p:nvSpPr>
-          <p:cNvPr id="5" name="TextBox 4"/>
-          <p:cNvSpPr txBox="1"/>
+              <a:t>Captured from</a:t>
+            </a:r>
+          </a:p>
+        </p:txBody>
+      </p:sp>
+      <p:sp>
+        <p:nvSpPr>
+          <p:cNvPr id="5" name="Rectangle 4"/>
+          <p:cNvSpPr/>
           <p:nvPr/>
         </p:nvSpPr>
         <p:spPr>
           <a:xfrm>
-            <a:off x="1461983" y="2185416"/>
-            <a:ext cx="10272817" cy="551688"/>
-          </a:xfrm>
-          <a:prstGeom prst="rect">
-            <a:avLst/>
-          </a:prstGeom>
-          <a:noFill/>
-        </p:spPr>
-        <p:txBody>
-          <a:bodyPr wrap="none" lIns="0" rIns="0">
-            <a:noAutofit/>
-          </a:bodyPr>
-          <a:lstStyle/>
-          <a:p>
-            <a:pPr algn="l"/>
-            <a:r>
-              <a:rPr sz="3400" b="0" i="0">
-                <a:solidFill>
-                  <a:srgbClr val="0A2240"/>
-                </a:solidFill>
-                <a:latin typeface="Arial"/>
-              </a:rPr>
-              <a:t>It is free</a:t>
-            </a:r>
+            <a:off x="457200" y="2072639"/>
+            <a:ext cx="8742204" cy="54864"/>
+          </a:xfrm>
+          <a:prstGeom prst="rect">
+            <a:avLst/>
+          </a:prstGeom>
+          <a:solidFill>
+            <a:srgbClr val="0072CE"/>
+          </a:solidFill>
+          <a:ln>
+            <a:noFill/>
+          </a:ln>
+          <a:effectLst/>
+        </p:spPr>
+        <p:style>
+          <a:lnRef idx="1">
+            <a:schemeClr val="accent1"/>
+          </a:lnRef>
+          <a:fillRef idx="3">
+            <a:schemeClr val="accent1"/>
+          </a:fillRef>
+          <a:effectRef idx="2">
+            <a:schemeClr val="accent1"/>
+          </a:effectRef>
+          <a:fontRef idx="minor">
+            <a:schemeClr val="lt1"/>
+          </a:fontRef>
+        </p:style>
+        <p:txBody>
+          <a:bodyPr rtlCol="0" anchor="ctr"/>
+          <a:lstStyle/>
+          <a:p>
+            <a:pPr algn="ctr"/>
           </a:p>
         </p:txBody>
       </p:sp>
@@ -19597,29 +18876,29 @@
         </p:nvSpPr>
         <p:spPr>
           <a:xfrm>
-            <a:off x="457200" y="3011424"/>
-            <a:ext cx="1132164" cy="640080"/>
-          </a:xfrm>
-          <a:prstGeom prst="rect">
-            <a:avLst/>
-          </a:prstGeom>
-          <a:noFill/>
-        </p:spPr>
-        <p:txBody>
-          <a:bodyPr wrap="none" lIns="0" rIns="0">
-            <a:noAutofit/>
-          </a:bodyPr>
-          <a:lstStyle/>
-          <a:p>
-            <a:pPr algn="l"/>
-            <a:r>
-              <a:rPr sz="4200" b="1" i="0">
-                <a:solidFill>
-                  <a:srgbClr val="0072CE"/>
-                </a:solidFill>
-                <a:latin typeface="Arial"/>
-              </a:rPr>
-              <a:t>02</a:t>
+            <a:off x="457200" y="2401823"/>
+            <a:ext cx="3485137" cy="452323"/>
+          </a:xfrm>
+          <a:prstGeom prst="rect">
+            <a:avLst/>
+          </a:prstGeom>
+          <a:noFill/>
+        </p:spPr>
+        <p:txBody>
+          <a:bodyPr wrap="none" lIns="0" rIns="0">
+            <a:noAutofit/>
+          </a:bodyPr>
+          <a:lstStyle/>
+          <a:p>
+            <a:pPr algn="l"/>
+            <a:r>
+              <a:rPr sz="3400" b="0" i="0">
+                <a:solidFill>
+                  <a:srgbClr val="0A2240"/>
+                </a:solidFill>
+                <a:latin typeface="Arial"/>
+              </a:rPr>
+              <a:t>Repository</a:t>
             </a:r>
           </a:p>
         </p:txBody>
@@ -19632,29 +18911,29 @@
         </p:nvSpPr>
         <p:spPr>
           <a:xfrm>
-            <a:off x="1461983" y="3011424"/>
-            <a:ext cx="10272817" cy="640080"/>
-          </a:xfrm>
-          <a:prstGeom prst="rect">
-            <a:avLst/>
-          </a:prstGeom>
-          <a:noFill/>
-        </p:spPr>
-        <p:txBody>
-          <a:bodyPr wrap="none" lIns="0" rIns="0">
-            <a:noAutofit/>
-          </a:bodyPr>
-          <a:lstStyle/>
-          <a:p>
-            <a:pPr algn="l"/>
-            <a:r>
-              <a:rPr sz="4200" b="1" i="0">
-                <a:solidFill>
-                  <a:srgbClr val="0072CE"/>
-                </a:solidFill>
-                <a:latin typeface="Arial"/>
-              </a:rPr>
-              <a:t>Create a repository</a:t>
+            <a:off x="4250618" y="2401823"/>
+            <a:ext cx="4948786" cy="452323"/>
+          </a:xfrm>
+          <a:prstGeom prst="rect">
+            <a:avLst/>
+          </a:prstGeom>
+          <a:noFill/>
+        </p:spPr>
+        <p:txBody>
+          <a:bodyPr wrap="none" lIns="0" rIns="0">
+            <a:noAutofit/>
+          </a:bodyPr>
+          <a:lstStyle/>
+          <a:p>
+            <a:pPr algn="l"/>
+            <a:r>
+              <a:rPr sz="3400" b="0" i="0">
+                <a:solidFill>
+                  <a:srgbClr val="0A2240"/>
+                </a:solidFill>
+                <a:latin typeface="Arial"/>
+              </a:rPr>
+              <a:t>…/ninth_circuit</a:t>
             </a:r>
           </a:p>
         </p:txBody>
@@ -19667,8 +18946,8 @@
         </p:nvSpPr>
         <p:spPr>
           <a:xfrm>
-            <a:off x="1461983" y="3697224"/>
-            <a:ext cx="10272817" cy="551688"/>
+            <a:off x="457200" y="3128466"/>
+            <a:ext cx="4789308" cy="452323"/>
           </a:xfrm>
           <a:prstGeom prst="rect">
             <a:avLst/>
@@ -19689,7 +18968,7 @@
                 </a:solidFill>
                 <a:latin typeface="Arial"/>
               </a:rPr>
-              <a:t>Tick the box to add a README</a:t>
+              <a:t>Commit history</a:t>
             </a:r>
           </a:p>
         </p:txBody>
@@ -19702,29 +18981,29 @@
         </p:nvSpPr>
         <p:spPr>
           <a:xfrm>
-            <a:off x="457200" y="4523232"/>
-            <a:ext cx="1132164" cy="640080"/>
-          </a:xfrm>
-          <a:prstGeom prst="rect">
-            <a:avLst/>
-          </a:prstGeom>
-          <a:noFill/>
-        </p:spPr>
-        <p:txBody>
-          <a:bodyPr wrap="none" lIns="0" rIns="0">
-            <a:noAutofit/>
-          </a:bodyPr>
-          <a:lstStyle/>
-          <a:p>
-            <a:pPr algn="l"/>
-            <a:r>
-              <a:rPr sz="4200" b="1" i="0">
-                <a:solidFill>
-                  <a:srgbClr val="0072CE"/>
-                </a:solidFill>
-                <a:latin typeface="Arial"/>
-              </a:rPr>
-              <a:t>03</a:t>
+            <a:off x="4250618" y="3128466"/>
+            <a:ext cx="7515721" cy="452323"/>
+          </a:xfrm>
+          <a:prstGeom prst="rect">
+            <a:avLst/>
+          </a:prstGeom>
+          <a:noFill/>
+        </p:spPr>
+        <p:txBody>
+          <a:bodyPr wrap="none" lIns="0" rIns="0">
+            <a:noAutofit/>
+          </a:bodyPr>
+          <a:lstStyle/>
+          <a:p>
+            <a:pPr algn="l"/>
+            <a:r>
+              <a:rPr sz="3400" b="0" i="0">
+                <a:solidFill>
+                  <a:srgbClr val="0A2240"/>
+                </a:solidFill>
+                <a:latin typeface="Arial"/>
+              </a:rPr>
+              <a:t>…/ninth_circuit/commits</a:t>
             </a:r>
           </a:p>
         </p:txBody>
@@ -19737,29 +19016,29 @@
         </p:nvSpPr>
         <p:spPr>
           <a:xfrm>
-            <a:off x="1461983" y="4523232"/>
-            <a:ext cx="10272817" cy="640080"/>
-          </a:xfrm>
-          <a:prstGeom prst="rect">
-            <a:avLst/>
-          </a:prstGeom>
-          <a:noFill/>
-        </p:spPr>
-        <p:txBody>
-          <a:bodyPr wrap="none" lIns="0" rIns="0">
-            <a:noAutofit/>
-          </a:bodyPr>
-          <a:lstStyle/>
-          <a:p>
-            <a:pPr algn="l"/>
-            <a:r>
-              <a:rPr sz="4200" b="1" i="0">
-                <a:solidFill>
-                  <a:srgbClr val="0072CE"/>
-                </a:solidFill>
-                <a:latin typeface="Arial"/>
-              </a:rPr>
-              <a:t>Edit the README</a:t>
+            <a:off x="457200" y="3855109"/>
+            <a:ext cx="3244778" cy="452323"/>
+          </a:xfrm>
+          <a:prstGeom prst="rect">
+            <a:avLst/>
+          </a:prstGeom>
+          <a:noFill/>
+        </p:spPr>
+        <p:txBody>
+          <a:bodyPr wrap="none" lIns="0" rIns="0">
+            <a:noAutofit/>
+          </a:bodyPr>
+          <a:lstStyle/>
+          <a:p>
+            <a:pPr algn="l"/>
+            <a:r>
+              <a:rPr sz="3400" b="0" i="0">
+                <a:solidFill>
+                  <a:srgbClr val="0A2240"/>
+                </a:solidFill>
+                <a:latin typeface="Arial"/>
+              </a:rPr>
+              <a:t>Actions</a:t>
             </a:r>
           </a:p>
         </p:txBody>
@@ -19772,8 +19051,8 @@
         </p:nvSpPr>
         <p:spPr>
           <a:xfrm>
-            <a:off x="1461983" y="5209032"/>
-            <a:ext cx="10272817" cy="551688"/>
+            <a:off x="4250618" y="3855109"/>
+            <a:ext cx="7133172" cy="452323"/>
           </a:xfrm>
           <a:prstGeom prst="rect">
             <a:avLst/>
@@ -19794,7 +19073,7 @@
                 </a:solidFill>
                 <a:latin typeface="Arial"/>
               </a:rPr>
-              <a:t>Commit it, and look at History</a:t>
+              <a:t>…/ninth_circuit/actions</a:t>
             </a:r>
           </a:p>
         </p:txBody>
@@ -19802,6 +19081,146 @@
       <p:sp>
         <p:nvSpPr>
           <p:cNvPr id="12" name="TextBox 11"/>
+          <p:cNvSpPr txBox="1"/>
+          <p:nvPr/>
+        </p:nvSpPr>
+        <p:spPr>
+          <a:xfrm>
+            <a:off x="457200" y="4581752"/>
+            <a:ext cx="4176692" cy="452323"/>
+          </a:xfrm>
+          <a:prstGeom prst="rect">
+            <a:avLst/>
+          </a:prstGeom>
+          <a:noFill/>
+        </p:spPr>
+        <p:txBody>
+          <a:bodyPr wrap="none" lIns="0" rIns="0">
+            <a:noAutofit/>
+          </a:bodyPr>
+          <a:lstStyle/>
+          <a:p>
+            <a:pPr algn="l"/>
+            <a:r>
+              <a:rPr sz="3400" b="0" i="0">
+                <a:solidFill>
+                  <a:srgbClr val="0A2240"/>
+                </a:solidFill>
+                <a:latin typeface="Arial"/>
+              </a:rPr>
+              <a:t>Pull requests</a:t>
+            </a:r>
+          </a:p>
+        </p:txBody>
+      </p:sp>
+      <p:sp>
+        <p:nvSpPr>
+          <p:cNvPr id="13" name="TextBox 12"/>
+          <p:cNvSpPr txBox="1"/>
+          <p:nvPr/>
+        </p:nvSpPr>
+        <p:spPr>
+          <a:xfrm>
+            <a:off x="4250618" y="4581752"/>
+            <a:ext cx="5213688" cy="452323"/>
+          </a:xfrm>
+          <a:prstGeom prst="rect">
+            <a:avLst/>
+          </a:prstGeom>
+          <a:noFill/>
+        </p:spPr>
+        <p:txBody>
+          <a:bodyPr wrap="none" lIns="0" rIns="0">
+            <a:noAutofit/>
+          </a:bodyPr>
+          <a:lstStyle/>
+          <a:p>
+            <a:pPr algn="l"/>
+            <a:r>
+              <a:rPr sz="3400" b="0" i="0">
+                <a:solidFill>
+                  <a:srgbClr val="0A2240"/>
+                </a:solidFill>
+                <a:latin typeface="Arial"/>
+              </a:rPr>
+              <a:t>docs.github.com</a:t>
+            </a:r>
+          </a:p>
+        </p:txBody>
+      </p:sp>
+      <p:sp>
+        <p:nvSpPr>
+          <p:cNvPr id="14" name="TextBox 13"/>
+          <p:cNvSpPr txBox="1"/>
+          <p:nvPr/>
+        </p:nvSpPr>
+        <p:spPr>
+          <a:xfrm>
+            <a:off x="457200" y="5308395"/>
+            <a:ext cx="3244778" cy="452323"/>
+          </a:xfrm>
+          <a:prstGeom prst="rect">
+            <a:avLst/>
+          </a:prstGeom>
+          <a:noFill/>
+        </p:spPr>
+        <p:txBody>
+          <a:bodyPr wrap="none" lIns="0" rIns="0">
+            <a:noAutofit/>
+          </a:bodyPr>
+          <a:lstStyle/>
+          <a:p>
+            <a:pPr algn="l"/>
+            <a:r>
+              <a:rPr sz="3400" b="0" i="0">
+                <a:solidFill>
+                  <a:srgbClr val="0A2240"/>
+                </a:solidFill>
+                <a:latin typeface="Arial"/>
+              </a:rPr>
+              <a:t>Pages</a:t>
+            </a:r>
+          </a:p>
+        </p:txBody>
+      </p:sp>
+      <p:sp>
+        <p:nvSpPr>
+          <p:cNvPr id="15" name="TextBox 14"/>
+          <p:cNvSpPr txBox="1"/>
+          <p:nvPr/>
+        </p:nvSpPr>
+        <p:spPr>
+          <a:xfrm>
+            <a:off x="4250618" y="5308395"/>
+            <a:ext cx="5213688" cy="452323"/>
+          </a:xfrm>
+          <a:prstGeom prst="rect">
+            <a:avLst/>
+          </a:prstGeom>
+          <a:noFill/>
+        </p:spPr>
+        <p:txBody>
+          <a:bodyPr wrap="none" lIns="0" rIns="0">
+            <a:noAutofit/>
+          </a:bodyPr>
+          <a:lstStyle/>
+          <a:p>
+            <a:pPr algn="l"/>
+            <a:r>
+              <a:rPr sz="3400" b="0" i="0">
+                <a:solidFill>
+                  <a:srgbClr val="0A2240"/>
+                </a:solidFill>
+                <a:latin typeface="Arial"/>
+              </a:rPr>
+              <a:t>docs.github.com</a:t>
+            </a:r>
+          </a:p>
+        </p:txBody>
+      </p:sp>
+      <p:sp>
+        <p:nvSpPr>
+          <p:cNvPr id="16" name="TextBox 15"/>
           <p:cNvSpPr/>
           <p:nvPr>
             <p:ph type="sldNum" idx="12"/>
@@ -19827,7 +19246,7 @@
             <a:fld id="{4B0E1F8A-6C1D-4E2A-9F3B-7A5C8D2E1F60}" type="slidenum">
               <a:rPr sz="1600" b="0" i="0">
                 <a:solidFill>
-                  <a:srgbClr val="5B6B82"/>
+                  <a:srgbClr val="0A2240"/>
                 </a:solidFill>
                 <a:latin typeface="Arial"/>
               </a:rPr>
@@ -19871,7 +19290,7 @@
         <p:spPr>
           <a:xfrm>
             <a:off x="457200" y="457200"/>
-            <a:ext cx="11734800" cy="768096"/>
+            <a:ext cx="11277600" cy="768096"/>
           </a:xfrm>
           <a:prstGeom prst="rect">
             <a:avLst/>
@@ -19892,7 +19311,7 @@
                 </a:solidFill>
                 <a:latin typeface="Arial"/>
               </a:rPr>
-              <a:t>Screenshots, Captured 21 Oct 2026</a:t>
+              <a:t>Your First Ten Minutes</a:t>
             </a:r>
           </a:p>
         </p:txBody>
@@ -19906,28 +19325,28 @@
         <p:spPr>
           <a:xfrm>
             <a:off x="457200" y="1499616"/>
-            <a:ext cx="3945612" cy="518159"/>
-          </a:xfrm>
-          <a:prstGeom prst="rect">
-            <a:avLst/>
-          </a:prstGeom>
-          <a:noFill/>
-        </p:spPr>
-        <p:txBody>
-          <a:bodyPr wrap="none" lIns="0" rIns="0">
-            <a:noAutofit/>
-          </a:bodyPr>
-          <a:lstStyle/>
-          <a:p>
-            <a:pPr algn="l"/>
-            <a:r>
-              <a:rPr sz="3400" b="1" i="0">
+            <a:ext cx="1132164" cy="640080"/>
+          </a:xfrm>
+          <a:prstGeom prst="rect">
+            <a:avLst/>
+          </a:prstGeom>
+          <a:noFill/>
+        </p:spPr>
+        <p:txBody>
+          <a:bodyPr wrap="none" lIns="0" rIns="0">
+            <a:noAutofit/>
+          </a:bodyPr>
+          <a:lstStyle/>
+          <a:p>
+            <a:pPr algn="l"/>
+            <a:r>
+              <a:rPr sz="4200" b="1" i="0">
                 <a:solidFill>
                   <a:srgbClr val="0072CE"/>
                 </a:solidFill>
                 <a:latin typeface="Arial"/>
               </a:rPr>
-              <a:t>Screenshot</a:t>
+              <a:t>01</a:t>
             </a:r>
           </a:p>
         </p:txBody>
@@ -19940,74 +19359,65 @@
         </p:nvSpPr>
         <p:spPr>
           <a:xfrm>
-            <a:off x="4250618" y="1499616"/>
-            <a:ext cx="4948786" cy="518159"/>
-          </a:xfrm>
-          <a:prstGeom prst="rect">
-            <a:avLst/>
-          </a:prstGeom>
-          <a:noFill/>
-        </p:spPr>
-        <p:txBody>
-          <a:bodyPr wrap="none" lIns="0" rIns="0">
-            <a:noAutofit/>
-          </a:bodyPr>
-          <a:lstStyle/>
-          <a:p>
-            <a:pPr algn="l"/>
-            <a:r>
-              <a:rPr sz="3400" b="1" i="0">
+            <a:off x="1461983" y="1499616"/>
+            <a:ext cx="10272817" cy="640080"/>
+          </a:xfrm>
+          <a:prstGeom prst="rect">
+            <a:avLst/>
+          </a:prstGeom>
+          <a:noFill/>
+        </p:spPr>
+        <p:txBody>
+          <a:bodyPr wrap="none" lIns="0" rIns="0">
+            <a:noAutofit/>
+          </a:bodyPr>
+          <a:lstStyle/>
+          <a:p>
+            <a:pPr algn="l"/>
+            <a:r>
+              <a:rPr sz="4200" b="1" i="0">
                 <a:solidFill>
                   <a:srgbClr val="0072CE"/>
                 </a:solidFill>
                 <a:latin typeface="Arial"/>
               </a:rPr>
-              <a:t>Captured from</a:t>
-            </a:r>
-          </a:p>
-        </p:txBody>
-      </p:sp>
-      <p:sp>
-        <p:nvSpPr>
-          <p:cNvPr id="5" name="Rectangle 4"/>
-          <p:cNvSpPr/>
+              <a:t>Make an account</a:t>
+            </a:r>
+          </a:p>
+        </p:txBody>
+      </p:sp>
+      <p:sp>
+        <p:nvSpPr>
+          <p:cNvPr id="5" name="TextBox 4"/>
+          <p:cNvSpPr txBox="1"/>
           <p:nvPr/>
         </p:nvSpPr>
         <p:spPr>
           <a:xfrm>
-            <a:off x="457200" y="2072639"/>
-            <a:ext cx="8742204" cy="54864"/>
-          </a:xfrm>
-          <a:prstGeom prst="rect">
-            <a:avLst/>
-          </a:prstGeom>
-          <a:solidFill>
-            <a:srgbClr val="0072CE"/>
-          </a:solidFill>
-          <a:ln>
-            <a:noFill/>
-          </a:ln>
-          <a:effectLst/>
-        </p:spPr>
-        <p:style>
-          <a:lnRef idx="1">
-            <a:schemeClr val="accent1"/>
-          </a:lnRef>
-          <a:fillRef idx="3">
-            <a:schemeClr val="accent1"/>
-          </a:fillRef>
-          <a:effectRef idx="2">
-            <a:schemeClr val="accent1"/>
-          </a:effectRef>
-          <a:fontRef idx="minor">
-            <a:schemeClr val="lt1"/>
-          </a:fontRef>
-        </p:style>
-        <p:txBody>
-          <a:bodyPr rtlCol="0" anchor="ctr"/>
-          <a:lstStyle/>
-          <a:p>
-            <a:pPr algn="ctr"/>
+            <a:off x="1461983" y="2185416"/>
+            <a:ext cx="10272817" cy="551688"/>
+          </a:xfrm>
+          <a:prstGeom prst="rect">
+            <a:avLst/>
+          </a:prstGeom>
+          <a:noFill/>
+        </p:spPr>
+        <p:txBody>
+          <a:bodyPr wrap="none" lIns="0" rIns="0">
+            <a:noAutofit/>
+          </a:bodyPr>
+          <a:lstStyle/>
+          <a:p>
+            <a:pPr algn="l"/>
+            <a:r>
+              <a:rPr sz="3400" b="0" i="0">
+                <a:solidFill>
+                  <a:srgbClr val="0A2240"/>
+                </a:solidFill>
+                <a:latin typeface="Arial"/>
+              </a:rPr>
+              <a:t>It is free</a:t>
+            </a:r>
           </a:p>
         </p:txBody>
       </p:sp>
@@ -20019,29 +19429,29 @@
         </p:nvSpPr>
         <p:spPr>
           <a:xfrm>
-            <a:off x="457200" y="2401823"/>
-            <a:ext cx="3485137" cy="452323"/>
-          </a:xfrm>
-          <a:prstGeom prst="rect">
-            <a:avLst/>
-          </a:prstGeom>
-          <a:noFill/>
-        </p:spPr>
-        <p:txBody>
-          <a:bodyPr wrap="none" lIns="0" rIns="0">
-            <a:noAutofit/>
-          </a:bodyPr>
-          <a:lstStyle/>
-          <a:p>
-            <a:pPr algn="l"/>
-            <a:r>
-              <a:rPr sz="3400" b="0" i="0">
-                <a:solidFill>
-                  <a:srgbClr val="0A2240"/>
-                </a:solidFill>
-                <a:latin typeface="Arial"/>
-              </a:rPr>
-              <a:t>Repository</a:t>
+            <a:off x="457200" y="3011424"/>
+            <a:ext cx="1132164" cy="640080"/>
+          </a:xfrm>
+          <a:prstGeom prst="rect">
+            <a:avLst/>
+          </a:prstGeom>
+          <a:noFill/>
+        </p:spPr>
+        <p:txBody>
+          <a:bodyPr wrap="none" lIns="0" rIns="0">
+            <a:noAutofit/>
+          </a:bodyPr>
+          <a:lstStyle/>
+          <a:p>
+            <a:pPr algn="l"/>
+            <a:r>
+              <a:rPr sz="4200" b="1" i="0">
+                <a:solidFill>
+                  <a:srgbClr val="0072CE"/>
+                </a:solidFill>
+                <a:latin typeface="Arial"/>
+              </a:rPr>
+              <a:t>02</a:t>
             </a:r>
           </a:p>
         </p:txBody>
@@ -20054,29 +19464,29 @@
         </p:nvSpPr>
         <p:spPr>
           <a:xfrm>
-            <a:off x="4250618" y="2401823"/>
-            <a:ext cx="4948786" cy="452323"/>
-          </a:xfrm>
-          <a:prstGeom prst="rect">
-            <a:avLst/>
-          </a:prstGeom>
-          <a:noFill/>
-        </p:spPr>
-        <p:txBody>
-          <a:bodyPr wrap="none" lIns="0" rIns="0">
-            <a:noAutofit/>
-          </a:bodyPr>
-          <a:lstStyle/>
-          <a:p>
-            <a:pPr algn="l"/>
-            <a:r>
-              <a:rPr sz="3400" b="0" i="0">
-                <a:solidFill>
-                  <a:srgbClr val="0A2240"/>
-                </a:solidFill>
-                <a:latin typeface="Arial"/>
-              </a:rPr>
-              <a:t>…/ninth_circuit</a:t>
+            <a:off x="1461983" y="3011424"/>
+            <a:ext cx="10272817" cy="640080"/>
+          </a:xfrm>
+          <a:prstGeom prst="rect">
+            <a:avLst/>
+          </a:prstGeom>
+          <a:noFill/>
+        </p:spPr>
+        <p:txBody>
+          <a:bodyPr wrap="none" lIns="0" rIns="0">
+            <a:noAutofit/>
+          </a:bodyPr>
+          <a:lstStyle/>
+          <a:p>
+            <a:pPr algn="l"/>
+            <a:r>
+              <a:rPr sz="4200" b="1" i="0">
+                <a:solidFill>
+                  <a:srgbClr val="0072CE"/>
+                </a:solidFill>
+                <a:latin typeface="Arial"/>
+              </a:rPr>
+              <a:t>Create a repository</a:t>
             </a:r>
           </a:p>
         </p:txBody>
@@ -20089,8 +19499,8 @@
         </p:nvSpPr>
         <p:spPr>
           <a:xfrm>
-            <a:off x="457200" y="3128466"/>
-            <a:ext cx="4789308" cy="452323"/>
+            <a:off x="1461983" y="3697224"/>
+            <a:ext cx="10272817" cy="551688"/>
           </a:xfrm>
           <a:prstGeom prst="rect">
             <a:avLst/>
@@ -20111,7 +19521,7 @@
                 </a:solidFill>
                 <a:latin typeface="Arial"/>
               </a:rPr>
-              <a:t>Commit history</a:t>
+              <a:t>Tick the box to add a README</a:t>
             </a:r>
           </a:p>
         </p:txBody>
@@ -20124,29 +19534,29 @@
         </p:nvSpPr>
         <p:spPr>
           <a:xfrm>
-            <a:off x="4250618" y="3128466"/>
-            <a:ext cx="7515721" cy="452323"/>
-          </a:xfrm>
-          <a:prstGeom prst="rect">
-            <a:avLst/>
-          </a:prstGeom>
-          <a:noFill/>
-        </p:spPr>
-        <p:txBody>
-          <a:bodyPr wrap="none" lIns="0" rIns="0">
-            <a:noAutofit/>
-          </a:bodyPr>
-          <a:lstStyle/>
-          <a:p>
-            <a:pPr algn="l"/>
-            <a:r>
-              <a:rPr sz="3400" b="0" i="0">
-                <a:solidFill>
-                  <a:srgbClr val="0A2240"/>
-                </a:solidFill>
-                <a:latin typeface="Arial"/>
-              </a:rPr>
-              <a:t>…/ninth_circuit/commits</a:t>
+            <a:off x="457200" y="4523232"/>
+            <a:ext cx="1132164" cy="640080"/>
+          </a:xfrm>
+          <a:prstGeom prst="rect">
+            <a:avLst/>
+          </a:prstGeom>
+          <a:noFill/>
+        </p:spPr>
+        <p:txBody>
+          <a:bodyPr wrap="none" lIns="0" rIns="0">
+            <a:noAutofit/>
+          </a:bodyPr>
+          <a:lstStyle/>
+          <a:p>
+            <a:pPr algn="l"/>
+            <a:r>
+              <a:rPr sz="4200" b="1" i="0">
+                <a:solidFill>
+                  <a:srgbClr val="0072CE"/>
+                </a:solidFill>
+                <a:latin typeface="Arial"/>
+              </a:rPr>
+              <a:t>03</a:t>
             </a:r>
           </a:p>
         </p:txBody>
@@ -20159,29 +19569,29 @@
         </p:nvSpPr>
         <p:spPr>
           <a:xfrm>
-            <a:off x="457200" y="3855109"/>
-            <a:ext cx="3244778" cy="452323"/>
-          </a:xfrm>
-          <a:prstGeom prst="rect">
-            <a:avLst/>
-          </a:prstGeom>
-          <a:noFill/>
-        </p:spPr>
-        <p:txBody>
-          <a:bodyPr wrap="none" lIns="0" rIns="0">
-            <a:noAutofit/>
-          </a:bodyPr>
-          <a:lstStyle/>
-          <a:p>
-            <a:pPr algn="l"/>
-            <a:r>
-              <a:rPr sz="3400" b="0" i="0">
-                <a:solidFill>
-                  <a:srgbClr val="0A2240"/>
-                </a:solidFill>
-                <a:latin typeface="Arial"/>
-              </a:rPr>
-              <a:t>Actions</a:t>
+            <a:off x="1461983" y="4523232"/>
+            <a:ext cx="10272817" cy="640080"/>
+          </a:xfrm>
+          <a:prstGeom prst="rect">
+            <a:avLst/>
+          </a:prstGeom>
+          <a:noFill/>
+        </p:spPr>
+        <p:txBody>
+          <a:bodyPr wrap="none" lIns="0" rIns="0">
+            <a:noAutofit/>
+          </a:bodyPr>
+          <a:lstStyle/>
+          <a:p>
+            <a:pPr algn="l"/>
+            <a:r>
+              <a:rPr sz="4200" b="1" i="0">
+                <a:solidFill>
+                  <a:srgbClr val="0072CE"/>
+                </a:solidFill>
+                <a:latin typeface="Arial"/>
+              </a:rPr>
+              <a:t>Edit the README</a:t>
             </a:r>
           </a:p>
         </p:txBody>
@@ -20194,8 +19604,8 @@
         </p:nvSpPr>
         <p:spPr>
           <a:xfrm>
-            <a:off x="4250618" y="3855109"/>
-            <a:ext cx="7133172" cy="452323"/>
+            <a:off x="1461983" y="5209032"/>
+            <a:ext cx="10272817" cy="551688"/>
           </a:xfrm>
           <a:prstGeom prst="rect">
             <a:avLst/>
@@ -20216,7 +19626,7 @@
                 </a:solidFill>
                 <a:latin typeface="Arial"/>
               </a:rPr>
-              <a:t>…/ninth_circuit/actions</a:t>
+              <a:t>Commit it, and look at History</a:t>
             </a:r>
           </a:p>
         </p:txBody>
@@ -20224,146 +19634,6 @@
       <p:sp>
         <p:nvSpPr>
           <p:cNvPr id="12" name="TextBox 11"/>
-          <p:cNvSpPr txBox="1"/>
-          <p:nvPr/>
-        </p:nvSpPr>
-        <p:spPr>
-          <a:xfrm>
-            <a:off x="457200" y="4581752"/>
-            <a:ext cx="4176692" cy="452323"/>
-          </a:xfrm>
-          <a:prstGeom prst="rect">
-            <a:avLst/>
-          </a:prstGeom>
-          <a:noFill/>
-        </p:spPr>
-        <p:txBody>
-          <a:bodyPr wrap="none" lIns="0" rIns="0">
-            <a:noAutofit/>
-          </a:bodyPr>
-          <a:lstStyle/>
-          <a:p>
-            <a:pPr algn="l"/>
-            <a:r>
-              <a:rPr sz="3400" b="0" i="0">
-                <a:solidFill>
-                  <a:srgbClr val="0A2240"/>
-                </a:solidFill>
-                <a:latin typeface="Arial"/>
-              </a:rPr>
-              <a:t>Pull requests</a:t>
-            </a:r>
-          </a:p>
-        </p:txBody>
-      </p:sp>
-      <p:sp>
-        <p:nvSpPr>
-          <p:cNvPr id="13" name="TextBox 12"/>
-          <p:cNvSpPr txBox="1"/>
-          <p:nvPr/>
-        </p:nvSpPr>
-        <p:spPr>
-          <a:xfrm>
-            <a:off x="4250618" y="4581752"/>
-            <a:ext cx="5213688" cy="452323"/>
-          </a:xfrm>
-          <a:prstGeom prst="rect">
-            <a:avLst/>
-          </a:prstGeom>
-          <a:noFill/>
-        </p:spPr>
-        <p:txBody>
-          <a:bodyPr wrap="none" lIns="0" rIns="0">
-            <a:noAutofit/>
-          </a:bodyPr>
-          <a:lstStyle/>
-          <a:p>
-            <a:pPr algn="l"/>
-            <a:r>
-              <a:rPr sz="3400" b="0" i="0">
-                <a:solidFill>
-                  <a:srgbClr val="0A2240"/>
-                </a:solidFill>
-                <a:latin typeface="Arial"/>
-              </a:rPr>
-              <a:t>docs.github.com</a:t>
-            </a:r>
-          </a:p>
-        </p:txBody>
-      </p:sp>
-      <p:sp>
-        <p:nvSpPr>
-          <p:cNvPr id="14" name="TextBox 13"/>
-          <p:cNvSpPr txBox="1"/>
-          <p:nvPr/>
-        </p:nvSpPr>
-        <p:spPr>
-          <a:xfrm>
-            <a:off x="457200" y="5308395"/>
-            <a:ext cx="3244778" cy="452323"/>
-          </a:xfrm>
-          <a:prstGeom prst="rect">
-            <a:avLst/>
-          </a:prstGeom>
-          <a:noFill/>
-        </p:spPr>
-        <p:txBody>
-          <a:bodyPr wrap="none" lIns="0" rIns="0">
-            <a:noAutofit/>
-          </a:bodyPr>
-          <a:lstStyle/>
-          <a:p>
-            <a:pPr algn="l"/>
-            <a:r>
-              <a:rPr sz="3400" b="0" i="0">
-                <a:solidFill>
-                  <a:srgbClr val="0A2240"/>
-                </a:solidFill>
-                <a:latin typeface="Arial"/>
-              </a:rPr>
-              <a:t>Pages</a:t>
-            </a:r>
-          </a:p>
-        </p:txBody>
-      </p:sp>
-      <p:sp>
-        <p:nvSpPr>
-          <p:cNvPr id="15" name="TextBox 14"/>
-          <p:cNvSpPr txBox="1"/>
-          <p:nvPr/>
-        </p:nvSpPr>
-        <p:spPr>
-          <a:xfrm>
-            <a:off x="4250618" y="5308395"/>
-            <a:ext cx="5213688" cy="452323"/>
-          </a:xfrm>
-          <a:prstGeom prst="rect">
-            <a:avLst/>
-          </a:prstGeom>
-          <a:noFill/>
-        </p:spPr>
-        <p:txBody>
-          <a:bodyPr wrap="none" lIns="0" rIns="0">
-            <a:noAutofit/>
-          </a:bodyPr>
-          <a:lstStyle/>
-          <a:p>
-            <a:pPr algn="l"/>
-            <a:r>
-              <a:rPr sz="3400" b="0" i="0">
-                <a:solidFill>
-                  <a:srgbClr val="0A2240"/>
-                </a:solidFill>
-                <a:latin typeface="Arial"/>
-              </a:rPr>
-              <a:t>docs.github.com</a:t>
-            </a:r>
-          </a:p>
-        </p:txBody>
-      </p:sp>
-      <p:sp>
-        <p:nvSpPr>
-          <p:cNvPr id="16" name="TextBox 15"/>
           <p:cNvSpPr/>
           <p:nvPr>
             <p:ph type="sldNum" idx="12"/>
@@ -20389,153 +19659,11 @@
             <a:fld id="{4B0E1F8A-6C1D-4E2A-9F3B-7A5C8D2E1F60}" type="slidenum">
               <a:rPr sz="1600" b="0" i="0">
                 <a:solidFill>
-                  <a:srgbClr val="5B6B82"/>
+                  <a:srgbClr val="0A2240"/>
                 </a:solidFill>
                 <a:latin typeface="Arial"/>
               </a:rPr>
               <a:t>18</a:t>
-            </a:fld>
-          </a:p>
-        </p:txBody>
-      </p:sp>
-    </p:spTree>
-  </p:cSld>
-  <p:clrMapOvr>
-    <a:masterClrMapping/>
-  </p:clrMapOvr>
-</p:sld>
-</file>
-
-<file path=ppt/slides/slide19.xml><?xml version="1.0" encoding="utf-8"?>
-<p:sld xmlns:a="http://schemas.openxmlformats.org/drawingml/2006/main" xmlns:p="http://schemas.openxmlformats.org/presentationml/2006/main" xmlns:r="http://schemas.openxmlformats.org/officeDocument/2006/relationships" showMasterSp="0">
-  <p:cSld>
-    <p:bg>
-      <p:bgPr>
-        <a:solidFill>
-          <a:srgbClr val="FFFFFF"/>
-        </a:solidFill>
-        <a:effectLst/>
-      </p:bgPr>
-    </p:bg>
-    <p:spTree>
-      <p:nvGrpSpPr>
-        <p:cNvPr id="1" name=""/>
-        <p:cNvGrpSpPr/>
-        <p:nvPr/>
-      </p:nvGrpSpPr>
-      <p:grpSpPr/>
-      <p:sp>
-        <p:nvSpPr>
-          <p:cNvPr id="2" name="Rectangle 1"/>
-          <p:cNvSpPr/>
-          <p:nvPr/>
-        </p:nvSpPr>
-        <p:spPr>
-          <a:xfrm>
-            <a:off x="457200" y="2926080"/>
-            <a:ext cx="128016" cy="1005840"/>
-          </a:xfrm>
-          <a:prstGeom prst="rect">
-            <a:avLst/>
-          </a:prstGeom>
-          <a:solidFill>
-            <a:srgbClr val="0072CE"/>
-          </a:solidFill>
-          <a:ln>
-            <a:noFill/>
-          </a:ln>
-          <a:effectLst/>
-        </p:spPr>
-        <p:style>
-          <a:lnRef idx="1">
-            <a:schemeClr val="accent1"/>
-          </a:lnRef>
-          <a:fillRef idx="3">
-            <a:schemeClr val="accent1"/>
-          </a:fillRef>
-          <a:effectRef idx="2">
-            <a:schemeClr val="accent1"/>
-          </a:effectRef>
-          <a:fontRef idx="minor">
-            <a:schemeClr val="lt1"/>
-          </a:fontRef>
-        </p:style>
-        <p:txBody>
-          <a:bodyPr rtlCol="0" anchor="ctr"/>
-          <a:lstStyle/>
-          <a:p>
-            <a:pPr algn="ctr"/>
-          </a:p>
-        </p:txBody>
-      </p:sp>
-      <p:sp>
-        <p:nvSpPr>
-          <p:cNvPr id="3" name="TextBox 2"/>
-          <p:cNvSpPr txBox="1"/>
-          <p:nvPr/>
-        </p:nvSpPr>
-        <p:spPr>
-          <a:xfrm>
-            <a:off x="996696" y="2926080"/>
-            <a:ext cx="11195304" cy="1005840"/>
-          </a:xfrm>
-          <a:prstGeom prst="rect">
-            <a:avLst/>
-          </a:prstGeom>
-          <a:noFill/>
-        </p:spPr>
-        <p:txBody>
-          <a:bodyPr wrap="none" lIns="0" rIns="0">
-            <a:noAutofit/>
-          </a:bodyPr>
-          <a:lstStyle/>
-          <a:p>
-            <a:pPr algn="l"/>
-            <a:r>
-              <a:rPr sz="6000" b="1" i="0">
-                <a:solidFill>
-                  <a:srgbClr val="0A2240"/>
-                </a:solidFill>
-                <a:latin typeface="Arial"/>
-              </a:rPr>
-              <a:t>What will you put in yours?</a:t>
-            </a:r>
-          </a:p>
-        </p:txBody>
-      </p:sp>
-      <p:sp>
-        <p:nvSpPr>
-          <p:cNvPr id="4" name="TextBox 3"/>
-          <p:cNvSpPr/>
-          <p:nvPr>
-            <p:ph type="sldNum" idx="12"/>
-          </p:nvPr>
-        </p:nvSpPr>
-        <p:spPr>
-          <a:xfrm>
-            <a:off x="11186160" y="6035040"/>
-            <a:ext cx="548640" cy="365760"/>
-          </a:xfrm>
-          <a:prstGeom prst="rect">
-            <a:avLst/>
-          </a:prstGeom>
-          <a:noFill/>
-        </p:spPr>
-        <p:txBody>
-          <a:bodyPr wrap="none" lIns="0" rIns="0">
-            <a:noAutofit/>
-          </a:bodyPr>
-          <a:lstStyle/>
-          <a:p>
-            <a:pPr algn="r"/>
-            <a:fld id="{4B0E1F8A-6C1D-4E2A-9F3B-7A5C8D2E1F60}" type="slidenum">
-              <a:rPr sz="1600" b="0" i="0">
-                <a:solidFill>
-                  <a:srgbClr val="5B6B82"/>
-                </a:solidFill>
-                <a:latin typeface="Arial"/>
-              </a:rPr>
-              <a:t>19</a:t>
             </a:fld>
           </a:p>
         </p:txBody>
@@ -20673,7 +19801,7 @@
             <a:fld id="{4B0E1F8A-6C1D-4E2A-9F3B-7A5C8D2E1F60}" type="slidenum">
               <a:rPr sz="1600" b="0" i="0">
                 <a:solidFill>
-                  <a:srgbClr val="5B6B82"/>
+                  <a:srgbClr val="0A2240"/>
                 </a:solidFill>
                 <a:latin typeface="Arial"/>
               </a:rPr>
@@ -20850,7 +19978,7 @@
             <a:fld id="{4B0E1F8A-6C1D-4E2A-9F3B-7A5C8D2E1F60}" type="slidenum">
               <a:rPr sz="1600" b="0" i="0">
                 <a:solidFill>
-                  <a:srgbClr val="5B6B82"/>
+                  <a:srgbClr val="0A2240"/>
                 </a:solidFill>
                 <a:latin typeface="Arial"/>
               </a:rPr>
@@ -21086,7 +20214,7 @@
             <a:r>
               <a:rPr sz="4200" b="1" i="0">
                 <a:solidFill>
-                  <a:srgbClr val="5B6B82"/>
+                  <a:srgbClr val="0A2240"/>
                 </a:solidFill>
                 <a:latin typeface="Arial"/>
               </a:rPr>
@@ -21123,7 +20251,7 @@
             <a:fld id="{4B0E1F8A-6C1D-4E2A-9F3B-7A5C8D2E1F60}" type="slidenum">
               <a:rPr sz="1600" b="0" i="0">
                 <a:solidFill>
-                  <a:srgbClr val="5B6B82"/>
+                  <a:srgbClr val="0A2240"/>
                 </a:solidFill>
                 <a:latin typeface="Arial"/>
               </a:rPr>
@@ -21300,7 +20428,7 @@
             <a:fld id="{4B0E1F8A-6C1D-4E2A-9F3B-7A5C8D2E1F60}" type="slidenum">
               <a:rPr sz="1600" b="0" i="0">
                 <a:solidFill>
-                  <a:srgbClr val="5B6B82"/>
+                  <a:srgbClr val="0A2240"/>
                 </a:solidFill>
                 <a:latin typeface="Arial"/>
               </a:rPr>
@@ -21527,7 +20655,7 @@
             <a:fld id="{4B0E1F8A-6C1D-4E2A-9F3B-7A5C8D2E1F60}" type="slidenum">
               <a:rPr sz="1600" b="0" i="0">
                 <a:solidFill>
-                  <a:srgbClr val="5B6B82"/>
+                  <a:srgbClr val="0A2240"/>
                 </a:solidFill>
                 <a:latin typeface="Arial"/>
               </a:rPr>
@@ -22055,7 +21183,7 @@
             <a:fld id="{4B0E1F8A-6C1D-4E2A-9F3B-7A5C8D2E1F60}" type="slidenum">
               <a:rPr sz="1600" b="0" i="0">
                 <a:solidFill>
-                  <a:srgbClr val="5B6B82"/>
+                  <a:srgbClr val="0A2240"/>
                 </a:solidFill>
                 <a:latin typeface="Arial"/>
               </a:rPr>
@@ -22232,7 +21360,7 @@
             <a:fld id="{4B0E1F8A-6C1D-4E2A-9F3B-7A5C8D2E1F60}" type="slidenum">
               <a:rPr sz="1600" b="0" i="0">
                 <a:solidFill>
-                  <a:srgbClr val="5B6B82"/>
+                  <a:srgbClr val="0A2240"/>
                 </a:solidFill>
                 <a:latin typeface="Arial"/>
               </a:rPr>
@@ -22459,7 +21587,7 @@
             <a:fld id="{4B0E1F8A-6C1D-4E2A-9F3B-7A5C8D2E1F60}" type="slidenum">
               <a:rPr sz="1600" b="0" i="0">
                 <a:solidFill>
-                  <a:srgbClr val="5B6B82"/>
+                  <a:srgbClr val="0A2240"/>
                 </a:solidFill>
                 <a:latin typeface="Arial"/>
               </a:rPr>
